--- a/project_43_document_forgery_detection/presentations/project_presentation.pptx
+++ b/project_43_document_forgery_detection/presentations/project_presentation.pptx
@@ -13,6 +13,13 @@
     <p:sldId id="261" r:id="rId12"/>
     <p:sldId id="262" r:id="rId13"/>
     <p:sldId id="263" r:id="rId14"/>
+    <p:sldId id="264" r:id="rId15"/>
+    <p:sldId id="265" r:id="rId16"/>
+    <p:sldId id="266" r:id="rId17"/>
+    <p:sldId id="267" r:id="rId18"/>
+    <p:sldId id="268" r:id="rId19"/>
+    <p:sldId id="269" r:id="rId20"/>
+    <p:sldId id="270" r:id="rId21"/>
   </p:sldIdLst>
   <p:sldSz cx="12191695" cy="6858000" type="screen4x3"/>
   <p:notesSz cx="6858000" cy="9144000"/>
@@ -3113,7 +3120,9 @@
             <a:srgbClr val="0F172A"/>
           </a:solidFill>
           <a:ln>
-            <a:noFill/>
+            <a:solidFill>
+              <a:srgbClr val="0F172A"/>
+            </a:solidFill>
           </a:ln>
         </p:spPr>
         <p:style>
@@ -3146,8 +3155,8 @@
         </p:nvSpPr>
         <p:spPr>
           <a:xfrm>
-            <a:off x="1097280" y="1645920"/>
-            <a:ext cx="10058400" cy="3474720"/>
+            <a:off x="914400" y="1828800"/>
+            <a:ext cx="10362895" cy="3200400"/>
           </a:xfrm>
           <a:prstGeom prst="rect">
             <a:avLst/>
@@ -3160,15 +3169,29 @@
           </a:bodyPr>
           <a:lstStyle/>
           <a:p>
+            <a:r>
+              <a:rPr b="1" sz="1400">
+                <a:solidFill>
+                  <a:srgbClr val="F43F5E"/>
+                </a:solidFill>
+              </a:rPr>
+              <a:t>AI FORENSICS &amp; DOCUMENT CYBERSECURITY • PROJECT-043</a:t>
+            </a:r>
+          </a:p>
+          <a:p>
             <a:pPr>
-              <a:defRPr sz="1400" b="1">
-                <a:solidFill>
-                  <a:srgbClr val="38BDF8"/>
-                </a:solidFill>
-              </a:defRPr>
+              <a:spcBef>
+                <a:spcPts val="1200"/>
+              </a:spcBef>
             </a:pPr>
             <a:r>
-              <a:t>PROJECT 43 OF 55  •  RESEARCH &amp; IMPLEMENTATION DECK</a:t>
+              <a:rPr b="1" sz="3600">
+                <a:solidFill>
+                  <a:srgbClr val="FFFFFF"/>
+                </a:solidFill>
+              </a:rPr>
+              <a:t>AI-Based Document Forgery Detection
+Using Image Processing &amp; Deep Learning</a:t>
             </a:r>
           </a:p>
           <a:p>
@@ -3176,29 +3199,2270 @@
               <a:spcBef>
                 <a:spcPts val="1400"/>
               </a:spcBef>
-              <a:defRPr sz="3200" b="1">
-                <a:solidFill>
-                  <a:srgbClr val="FFFFFF"/>
-                </a:solidFill>
-              </a:defRPr>
             </a:pPr>
             <a:r>
-              <a:t>AI-BASED DOCUMENT FORGERY DETECTION USING IMAGE PROCESSING AND DEEP LEARNING</a:t>
+              <a:rPr sz="1600">
+                <a:solidFill>
+                  <a:srgbClr val="CBD5E1"/>
+                </a:solidFill>
+              </a:rPr>
+              <a:t>Spatial Error Level Analysis (ELA), 2D-DCT Frequency Residual Fusion &amp; Cryptographic SHA-256 Audit Chaining</a:t>
+            </a:r>
+          </a:p>
+        </p:txBody>
+      </p:sp>
+    </p:spTree>
+  </p:cSld>
+  <p:clrMapOvr>
+    <a:masterClrMapping/>
+  </p:clrMapOvr>
+</p:sld>
+</file>
+
+<file path=ppt/slides/slide10.xml><?xml version="1.0" encoding="utf-8"?>
+<p:sld xmlns:a="http://schemas.openxmlformats.org/drawingml/2006/main" xmlns:p="http://schemas.openxmlformats.org/presentationml/2006/main" xmlns:r="http://schemas.openxmlformats.org/officeDocument/2006/relationships">
+  <p:cSld>
+    <p:spTree>
+      <p:nvGrpSpPr>
+        <p:cNvPr id="1" name=""/>
+        <p:cNvGrpSpPr/>
+        <p:nvPr/>
+      </p:nvGrpSpPr>
+      <p:grpSpPr/>
+      <p:sp>
+        <p:nvSpPr>
+          <p:cNvPr id="2" name="TextBox 1"/>
+          <p:cNvSpPr txBox="1"/>
+          <p:nvPr/>
+        </p:nvSpPr>
+        <p:spPr>
+          <a:xfrm>
+            <a:off x="731520" y="365760"/>
+            <a:ext cx="10728655" cy="822960"/>
+          </a:xfrm>
+          <a:prstGeom prst="rect">
+            <a:avLst/>
+          </a:prstGeom>
+          <a:noFill/>
+        </p:spPr>
+        <p:txBody>
+          <a:bodyPr wrap="square" lIns="0" tIns="0" rIns="0" bIns="0">
+            <a:spAutoFit/>
+          </a:bodyPr>
+          <a:lstStyle/>
+          <a:p>
+            <a:r>
+              <a:rPr b="1" sz="1000">
+                <a:solidFill>
+                  <a:srgbClr val="F43F5E"/>
+                </a:solidFill>
+              </a:rPr>
+              <a:t>FORENSIC DEFENSE • PROJECT-043</a:t>
+            </a:r>
+          </a:p>
+          <a:p>
+            <a:r>
+              <a:rPr b="1" sz="2000">
+                <a:solidFill>
+                  <a:srgbClr val="0F172A"/>
+                </a:solidFill>
+              </a:rPr>
+              <a:t>Splicing Forgery Interception: Stanford Degree Certificate</a:t>
+            </a:r>
+          </a:p>
+        </p:txBody>
+      </p:sp>
+      <p:pic>
+        <p:nvPicPr>
+          <p:cNvPr id="3" name="Picture 2" descr="05_splicing_forgery_detected.png"/>
+          <p:cNvPicPr>
+            <a:picLocks noChangeAspect="1"/>
+          </p:cNvPicPr>
+          <p:nvPr/>
+        </p:nvPicPr>
+        <p:blipFill>
+          <a:blip r:embed="rId2"/>
+          <a:stretch>
+            <a:fillRect/>
+          </a:stretch>
+        </p:blipFill>
+        <p:spPr>
+          <a:xfrm>
+            <a:off x="731520" y="1371600"/>
+            <a:ext cx="6583680" cy="4937760"/>
+          </a:xfrm>
+          <a:prstGeom prst="rect">
+            <a:avLst/>
+          </a:prstGeom>
+        </p:spPr>
+      </p:pic>
+      <p:sp>
+        <p:nvSpPr>
+          <p:cNvPr id="4" name="Rectangle 3"/>
+          <p:cNvSpPr/>
+          <p:nvPr/>
+        </p:nvSpPr>
+        <p:spPr>
+          <a:xfrm>
+            <a:off x="7589520" y="1371600"/>
+            <a:ext cx="3840480" cy="4937760"/>
+          </a:xfrm>
+          <a:prstGeom prst="rect">
+            <a:avLst/>
+          </a:prstGeom>
+          <a:solidFill>
+            <a:srgbClr val="FFFFFF"/>
+          </a:solidFill>
+          <a:ln w="12700">
+            <a:solidFill>
+              <a:srgbClr val="E2E8F0"/>
+            </a:solidFill>
+          </a:ln>
+        </p:spPr>
+        <p:style>
+          <a:lnRef idx="1">
+            <a:schemeClr val="accent1"/>
+          </a:lnRef>
+          <a:fillRef idx="3">
+            <a:schemeClr val="accent1"/>
+          </a:fillRef>
+          <a:effectRef idx="2">
+            <a:schemeClr val="accent1"/>
+          </a:effectRef>
+          <a:fontRef idx="minor">
+            <a:schemeClr val="lt1"/>
+          </a:fontRef>
+        </p:style>
+        <p:txBody>
+          <a:bodyPr rtlCol="0" anchor="ctr"/>
+          <a:lstStyle/>
+          <a:p>
+            <a:pPr algn="ctr"/>
+          </a:p>
+        </p:txBody>
+      </p:sp>
+      <p:sp>
+        <p:nvSpPr>
+          <p:cNvPr id="5" name="TextBox 4"/>
+          <p:cNvSpPr txBox="1"/>
+          <p:nvPr/>
+        </p:nvSpPr>
+        <p:spPr>
+          <a:xfrm>
+            <a:off x="7772400" y="1554480"/>
+            <a:ext cx="3474720" cy="4572000"/>
+          </a:xfrm>
+          <a:prstGeom prst="rect">
+            <a:avLst/>
+          </a:prstGeom>
+          <a:noFill/>
+        </p:spPr>
+        <p:txBody>
+          <a:bodyPr wrap="square" lIns="0" tIns="0" rIns="0" bIns="0">
+            <a:spAutoFit/>
+          </a:bodyPr>
+          <a:lstStyle/>
+          <a:p>
+            <a:r>
+              <a:rPr b="1" sz="1400">
+                <a:solidFill>
+                  <a:srgbClr val="0F172A"/>
+                </a:solidFill>
+              </a:rPr>
+              <a:t>Splicing Manipulation Breakdown</a:t>
             </a:r>
           </a:p>
           <a:p>
             <a:pPr>
               <a:spcBef>
-                <a:spcPts val="1200"/>
+                <a:spcPts val="600"/>
               </a:spcBef>
-              <a:defRPr sz="1600">
-                <a:solidFill>
-                  <a:srgbClr val="CBD5E1"/>
-                </a:solidFill>
-              </a:defRPr>
             </a:pPr>
             <a:r>
-              <a:t>Enterprise-Grade AI Architecture, Machine Learning Pipeline &amp; Deployment Framework</a:t>
+              <a:rPr b="1" sz="1100">
+                <a:solidFill>
+                  <a:srgbClr val="F43F5E"/>
+                </a:solidFill>
+              </a:rPr>
+              <a:t>• </a:t>
+            </a:r>
+            <a:r>
+              <a:rPr b="1" sz="1100">
+                <a:solidFill>
+                  <a:srgbClr val="1E293B"/>
+                </a:solidFill>
+              </a:rPr>
+              <a:t>Forensic Verdict: FORGED: </a:t>
+            </a:r>
+            <a:r>
+              <a:rPr sz="1100">
+                <a:solidFill>
+                  <a:srgbClr val="64748B"/>
+                </a:solidFill>
+              </a:rPr>
+              <a:t>High-priority security alert dispatched; certificate flagged for fraudulent degree claim.</a:t>
+            </a:r>
+          </a:p>
+          <a:p>
+            <a:pPr>
+              <a:spcBef>
+                <a:spcPts val="600"/>
+              </a:spcBef>
+            </a:pPr>
+            <a:r>
+              <a:rPr b="1" sz="1100">
+                <a:solidFill>
+                  <a:srgbClr val="F43F5E"/>
+                </a:solidFill>
+              </a:rPr>
+              <a:t>• </a:t>
+            </a:r>
+            <a:r>
+              <a:rPr b="1" sz="1100">
+                <a:solidFill>
+                  <a:srgbClr val="1E293B"/>
+                </a:solidFill>
+              </a:rPr>
+              <a:t>Forgery Probability: 96.5%: </a:t>
+            </a:r>
+            <a:r>
+              <a:rPr sz="1100">
+                <a:solidFill>
+                  <a:srgbClr val="64748B"/>
+                </a:solidFill>
+              </a:rPr>
+              <a:t>High-confidence detection of spliced candidate name and graduation year.</a:t>
+            </a:r>
+          </a:p>
+          <a:p>
+            <a:pPr>
+              <a:spcBef>
+                <a:spcPts val="600"/>
+              </a:spcBef>
+            </a:pPr>
+            <a:r>
+              <a:rPr b="1" sz="1100">
+                <a:solidFill>
+                  <a:srgbClr val="F43F5E"/>
+                </a:solidFill>
+              </a:rPr>
+              <a:t>• </a:t>
+            </a:r>
+            <a:r>
+              <a:rPr b="1" sz="1100">
+                <a:solidFill>
+                  <a:srgbClr val="1E293B"/>
+                </a:solidFill>
+              </a:rPr>
+              <a:t>Tampered Area: 24.8%: </a:t>
+            </a:r>
+            <a:r>
+              <a:rPr sz="1100">
+                <a:solidFill>
+                  <a:srgbClr val="64748B"/>
+                </a:solidFill>
+              </a:rPr>
+              <a:t>Exact spatial bounding box flags the manipulated parchment region.</a:t>
+            </a:r>
+          </a:p>
+          <a:p>
+            <a:pPr>
+              <a:spcBef>
+                <a:spcPts val="600"/>
+              </a:spcBef>
+            </a:pPr>
+            <a:r>
+              <a:rPr b="1" sz="1100">
+                <a:solidFill>
+                  <a:srgbClr val="F43F5E"/>
+                </a:solidFill>
+              </a:rPr>
+              <a:t>• </a:t>
+            </a:r>
+            <a:r>
+              <a:rPr b="1" sz="1100">
+                <a:solidFill>
+                  <a:srgbClr val="1E293B"/>
+                </a:solidFill>
+              </a:rPr>
+              <a:t>Severe ELA Compression Mismatch: </a:t>
+            </a:r>
+            <a:r>
+              <a:rPr sz="1100">
+                <a:solidFill>
+                  <a:srgbClr val="64748B"/>
+                </a:solidFill>
+              </a:rPr>
+              <a:t>ELA discrepancy score of 9.12 pts reveals foreign JPEG quantization grid.</a:t>
+            </a:r>
+          </a:p>
+        </p:txBody>
+      </p:sp>
+    </p:spTree>
+  </p:cSld>
+  <p:clrMapOvr>
+    <a:masterClrMapping/>
+  </p:clrMapOvr>
+</p:sld>
+</file>
+
+<file path=ppt/slides/slide11.xml><?xml version="1.0" encoding="utf-8"?>
+<p:sld xmlns:a="http://schemas.openxmlformats.org/drawingml/2006/main" xmlns:p="http://schemas.openxmlformats.org/presentationml/2006/main" xmlns:r="http://schemas.openxmlformats.org/officeDocument/2006/relationships">
+  <p:cSld>
+    <p:spTree>
+      <p:nvGrpSpPr>
+        <p:cNvPr id="1" name=""/>
+        <p:cNvGrpSpPr/>
+        <p:nvPr/>
+      </p:nvGrpSpPr>
+      <p:grpSpPr/>
+      <p:sp>
+        <p:nvSpPr>
+          <p:cNvPr id="2" name="TextBox 1"/>
+          <p:cNvSpPr txBox="1"/>
+          <p:nvPr/>
+        </p:nvSpPr>
+        <p:spPr>
+          <a:xfrm>
+            <a:off x="731520" y="365760"/>
+            <a:ext cx="10728655" cy="822960"/>
+          </a:xfrm>
+          <a:prstGeom prst="rect">
+            <a:avLst/>
+          </a:prstGeom>
+          <a:noFill/>
+        </p:spPr>
+        <p:txBody>
+          <a:bodyPr wrap="square" lIns="0" tIns="0" rIns="0" bIns="0">
+            <a:spAutoFit/>
+          </a:bodyPr>
+          <a:lstStyle/>
+          <a:p>
+            <a:r>
+              <a:rPr b="1" sz="1000">
+                <a:solidFill>
+                  <a:srgbClr val="F43F5E"/>
+                </a:solidFill>
+              </a:rPr>
+              <a:t>FORENSIC DEFENSE • PROJECT-043</a:t>
+            </a:r>
+          </a:p>
+          <a:p>
+            <a:r>
+              <a:rPr b="1" sz="2000">
+                <a:solidFill>
+                  <a:srgbClr val="0F172A"/>
+                </a:solidFill>
+              </a:rPr>
+              <a:t>Copy-Move Forgery Interception: Real Estate Agreement</a:t>
+            </a:r>
+          </a:p>
+        </p:txBody>
+      </p:sp>
+      <p:pic>
+        <p:nvPicPr>
+          <p:cNvPr id="3" name="Picture 2" descr="06_copy_move_forgery_detected.png"/>
+          <p:cNvPicPr>
+            <a:picLocks noChangeAspect="1"/>
+          </p:cNvPicPr>
+          <p:nvPr/>
+        </p:nvPicPr>
+        <p:blipFill>
+          <a:blip r:embed="rId2"/>
+          <a:stretch>
+            <a:fillRect/>
+          </a:stretch>
+        </p:blipFill>
+        <p:spPr>
+          <a:xfrm>
+            <a:off x="731520" y="1371600"/>
+            <a:ext cx="6583680" cy="4937760"/>
+          </a:xfrm>
+          <a:prstGeom prst="rect">
+            <a:avLst/>
+          </a:prstGeom>
+        </p:spPr>
+      </p:pic>
+      <p:sp>
+        <p:nvSpPr>
+          <p:cNvPr id="4" name="Rectangle 3"/>
+          <p:cNvSpPr/>
+          <p:nvPr/>
+        </p:nvSpPr>
+        <p:spPr>
+          <a:xfrm>
+            <a:off x="7589520" y="1371600"/>
+            <a:ext cx="3840480" cy="4937760"/>
+          </a:xfrm>
+          <a:prstGeom prst="rect">
+            <a:avLst/>
+          </a:prstGeom>
+          <a:solidFill>
+            <a:srgbClr val="FFFFFF"/>
+          </a:solidFill>
+          <a:ln w="12700">
+            <a:solidFill>
+              <a:srgbClr val="E2E8F0"/>
+            </a:solidFill>
+          </a:ln>
+        </p:spPr>
+        <p:style>
+          <a:lnRef idx="1">
+            <a:schemeClr val="accent1"/>
+          </a:lnRef>
+          <a:fillRef idx="3">
+            <a:schemeClr val="accent1"/>
+          </a:fillRef>
+          <a:effectRef idx="2">
+            <a:schemeClr val="accent1"/>
+          </a:effectRef>
+          <a:fontRef idx="minor">
+            <a:schemeClr val="lt1"/>
+          </a:fontRef>
+        </p:style>
+        <p:txBody>
+          <a:bodyPr rtlCol="0" anchor="ctr"/>
+          <a:lstStyle/>
+          <a:p>
+            <a:pPr algn="ctr"/>
+          </a:p>
+        </p:txBody>
+      </p:sp>
+      <p:sp>
+        <p:nvSpPr>
+          <p:cNvPr id="5" name="TextBox 4"/>
+          <p:cNvSpPr txBox="1"/>
+          <p:nvPr/>
+        </p:nvSpPr>
+        <p:spPr>
+          <a:xfrm>
+            <a:off x="7772400" y="1554480"/>
+            <a:ext cx="3474720" cy="4572000"/>
+          </a:xfrm>
+          <a:prstGeom prst="rect">
+            <a:avLst/>
+          </a:prstGeom>
+          <a:noFill/>
+        </p:spPr>
+        <p:txBody>
+          <a:bodyPr wrap="square" lIns="0" tIns="0" rIns="0" bIns="0">
+            <a:spAutoFit/>
+          </a:bodyPr>
+          <a:lstStyle/>
+          <a:p>
+            <a:r>
+              <a:rPr b="1" sz="1400">
+                <a:solidFill>
+                  <a:srgbClr val="0F172A"/>
+                </a:solidFill>
+              </a:rPr>
+              <a:t>Copy-Move Manipulation Breakdown</a:t>
+            </a:r>
+          </a:p>
+          <a:p>
+            <a:pPr>
+              <a:spcBef>
+                <a:spcPts val="600"/>
+              </a:spcBef>
+            </a:pPr>
+            <a:r>
+              <a:rPr b="1" sz="1100">
+                <a:solidFill>
+                  <a:srgbClr val="F43F5E"/>
+                </a:solidFill>
+              </a:rPr>
+              <a:t>• </a:t>
+            </a:r>
+            <a:r>
+              <a:rPr b="1" sz="1100">
+                <a:solidFill>
+                  <a:srgbClr val="1E293B"/>
+                </a:solidFill>
+              </a:rPr>
+              <a:t>Forensic Verdict: FORGED: </a:t>
+            </a:r>
+            <a:r>
+              <a:rPr sz="1100">
+                <a:solidFill>
+                  <a:srgbClr val="64748B"/>
+                </a:solidFill>
+              </a:rPr>
+              <a:t>Contract agreement rejected; escrow transfer halted pending legal review.</a:t>
+            </a:r>
+          </a:p>
+          <a:p>
+            <a:pPr>
+              <a:spcBef>
+                <a:spcPts val="600"/>
+              </a:spcBef>
+            </a:pPr>
+            <a:r>
+              <a:rPr b="1" sz="1100">
+                <a:solidFill>
+                  <a:srgbClr val="F43F5E"/>
+                </a:solidFill>
+              </a:rPr>
+              <a:t>• </a:t>
+            </a:r>
+            <a:r>
+              <a:rPr b="1" sz="1100">
+                <a:solidFill>
+                  <a:srgbClr val="1E293B"/>
+                </a:solidFill>
+              </a:rPr>
+              <a:t>Cloned Stamp &amp; Signature Block: </a:t>
+            </a:r>
+            <a:r>
+              <a:rPr sz="1100">
+                <a:solidFill>
+                  <a:srgbClr val="64748B"/>
+                </a:solidFill>
+              </a:rPr>
+              <a:t>Copy-move keypoint matching detects duplicated official notary stamp.</a:t>
+            </a:r>
+          </a:p>
+          <a:p>
+            <a:pPr>
+              <a:spcBef>
+                <a:spcPts val="600"/>
+              </a:spcBef>
+            </a:pPr>
+            <a:r>
+              <a:rPr b="1" sz="1100">
+                <a:solidFill>
+                  <a:srgbClr val="F43F5E"/>
+                </a:solidFill>
+              </a:rPr>
+              <a:t>• </a:t>
+            </a:r>
+            <a:r>
+              <a:rPr b="1" sz="1100">
+                <a:solidFill>
+                  <a:srgbClr val="1E293B"/>
+                </a:solidFill>
+              </a:rPr>
+              <a:t>Forgery Probability: 88.5%: </a:t>
+            </a:r>
+            <a:r>
+              <a:rPr sz="1100">
+                <a:solidFill>
+                  <a:srgbClr val="64748B"/>
+                </a:solidFill>
+              </a:rPr>
+              <a:t>Dual-domain classifier confirms identical texture noise in duplicated regions.</a:t>
+            </a:r>
+          </a:p>
+          <a:p>
+            <a:pPr>
+              <a:spcBef>
+                <a:spcPts val="600"/>
+              </a:spcBef>
+            </a:pPr>
+            <a:r>
+              <a:rPr b="1" sz="1100">
+                <a:solidFill>
+                  <a:srgbClr val="F43F5E"/>
+                </a:solidFill>
+              </a:rPr>
+              <a:t>• </a:t>
+            </a:r>
+            <a:r>
+              <a:rPr b="1" sz="1100">
+                <a:solidFill>
+                  <a:srgbClr val="1E293B"/>
+                </a:solidFill>
+              </a:rPr>
+              <a:t>Tampered Area: 14.2%: </a:t>
+            </a:r>
+            <a:r>
+              <a:rPr sz="1100">
+                <a:solidFill>
+                  <a:srgbClr val="64748B"/>
+                </a:solidFill>
+              </a:rPr>
+              <a:t>Localized copy-move bounding box rendered directly on forensic HUD.</a:t>
+            </a:r>
+          </a:p>
+        </p:txBody>
+      </p:sp>
+    </p:spTree>
+  </p:cSld>
+  <p:clrMapOvr>
+    <a:masterClrMapping/>
+  </p:clrMapOvr>
+</p:sld>
+</file>
+
+<file path=ppt/slides/slide12.xml><?xml version="1.0" encoding="utf-8"?>
+<p:sld xmlns:a="http://schemas.openxmlformats.org/drawingml/2006/main" xmlns:p="http://schemas.openxmlformats.org/presentationml/2006/main" xmlns:r="http://schemas.openxmlformats.org/officeDocument/2006/relationships">
+  <p:cSld>
+    <p:spTree>
+      <p:nvGrpSpPr>
+        <p:cNvPr id="1" name=""/>
+        <p:cNvGrpSpPr/>
+        <p:nvPr/>
+      </p:nvGrpSpPr>
+      <p:grpSpPr/>
+      <p:sp>
+        <p:nvSpPr>
+          <p:cNvPr id="2" name="TextBox 1"/>
+          <p:cNvSpPr txBox="1"/>
+          <p:nvPr/>
+        </p:nvSpPr>
+        <p:spPr>
+          <a:xfrm>
+            <a:off x="731520" y="365760"/>
+            <a:ext cx="10728655" cy="822960"/>
+          </a:xfrm>
+          <a:prstGeom prst="rect">
+            <a:avLst/>
+          </a:prstGeom>
+          <a:noFill/>
+        </p:spPr>
+        <p:txBody>
+          <a:bodyPr wrap="square" lIns="0" tIns="0" rIns="0" bIns="0">
+            <a:spAutoFit/>
+          </a:bodyPr>
+          <a:lstStyle/>
+          <a:p>
+            <a:r>
+              <a:rPr b="1" sz="1000">
+                <a:solidFill>
+                  <a:srgbClr val="F43F5E"/>
+                </a:solidFill>
+              </a:rPr>
+              <a:t>BLOCKCHAIN SECURITY • PROJECT-043</a:t>
+            </a:r>
+          </a:p>
+          <a:p>
+            <a:r>
+              <a:rPr b="1" sz="2000">
+                <a:solidFill>
+                  <a:srgbClr val="0F172A"/>
+                </a:solidFill>
+              </a:rPr>
+              <a:t>Cryptographic Audit Ledger &amp; Chain of Custody</a:t>
+            </a:r>
+          </a:p>
+        </p:txBody>
+      </p:sp>
+      <p:pic>
+        <p:nvPicPr>
+          <p:cNvPr id="3" name="Picture 2" descr="08_cryptographic_audit_ledger.png"/>
+          <p:cNvPicPr>
+            <a:picLocks noChangeAspect="1"/>
+          </p:cNvPicPr>
+          <p:nvPr/>
+        </p:nvPicPr>
+        <p:blipFill>
+          <a:blip r:embed="rId2"/>
+          <a:stretch>
+            <a:fillRect/>
+          </a:stretch>
+        </p:blipFill>
+        <p:spPr>
+          <a:xfrm>
+            <a:off x="731520" y="1371600"/>
+            <a:ext cx="6583680" cy="4937760"/>
+          </a:xfrm>
+          <a:prstGeom prst="rect">
+            <a:avLst/>
+          </a:prstGeom>
+        </p:spPr>
+      </p:pic>
+      <p:sp>
+        <p:nvSpPr>
+          <p:cNvPr id="4" name="Rectangle 3"/>
+          <p:cNvSpPr/>
+          <p:nvPr/>
+        </p:nvSpPr>
+        <p:spPr>
+          <a:xfrm>
+            <a:off x="7589520" y="1371600"/>
+            <a:ext cx="3840480" cy="4937760"/>
+          </a:xfrm>
+          <a:prstGeom prst="rect">
+            <a:avLst/>
+          </a:prstGeom>
+          <a:solidFill>
+            <a:srgbClr val="FFFFFF"/>
+          </a:solidFill>
+          <a:ln w="12700">
+            <a:solidFill>
+              <a:srgbClr val="E2E8F0"/>
+            </a:solidFill>
+          </a:ln>
+        </p:spPr>
+        <p:style>
+          <a:lnRef idx="1">
+            <a:schemeClr val="accent1"/>
+          </a:lnRef>
+          <a:fillRef idx="3">
+            <a:schemeClr val="accent1"/>
+          </a:fillRef>
+          <a:effectRef idx="2">
+            <a:schemeClr val="accent1"/>
+          </a:effectRef>
+          <a:fontRef idx="minor">
+            <a:schemeClr val="lt1"/>
+          </a:fontRef>
+        </p:style>
+        <p:txBody>
+          <a:bodyPr rtlCol="0" anchor="ctr"/>
+          <a:lstStyle/>
+          <a:p>
+            <a:pPr algn="ctr"/>
+          </a:p>
+        </p:txBody>
+      </p:sp>
+      <p:sp>
+        <p:nvSpPr>
+          <p:cNvPr id="5" name="TextBox 4"/>
+          <p:cNvSpPr txBox="1"/>
+          <p:nvPr/>
+        </p:nvSpPr>
+        <p:spPr>
+          <a:xfrm>
+            <a:off x="7772400" y="1554480"/>
+            <a:ext cx="3474720" cy="4572000"/>
+          </a:xfrm>
+          <a:prstGeom prst="rect">
+            <a:avLst/>
+          </a:prstGeom>
+          <a:noFill/>
+        </p:spPr>
+        <p:txBody>
+          <a:bodyPr wrap="square" lIns="0" tIns="0" rIns="0" bIns="0">
+            <a:spAutoFit/>
+          </a:bodyPr>
+          <a:lstStyle/>
+          <a:p>
+            <a:r>
+              <a:rPr b="1" sz="1400">
+                <a:solidFill>
+                  <a:srgbClr val="0F172A"/>
+                </a:solidFill>
+              </a:rPr>
+              <a:t>Ledger Cryptographic Guarantees</a:t>
+            </a:r>
+          </a:p>
+          <a:p>
+            <a:pPr>
+              <a:spcBef>
+                <a:spcPts val="600"/>
+              </a:spcBef>
+            </a:pPr>
+            <a:r>
+              <a:rPr b="1" sz="1100">
+                <a:solidFill>
+                  <a:srgbClr val="F43F5E"/>
+                </a:solidFill>
+              </a:rPr>
+              <a:t>• </a:t>
+            </a:r>
+            <a:r>
+              <a:rPr b="1" sz="1100">
+                <a:solidFill>
+                  <a:srgbClr val="1E293B"/>
+                </a:solidFill>
+              </a:rPr>
+              <a:t>Genesis Hash Seeding: </a:t>
+            </a:r>
+            <a:r>
+              <a:rPr sz="1100">
+                <a:solidFill>
+                  <a:srgbClr val="64748B"/>
+                </a:solidFill>
+              </a:rPr>
+              <a:t>Block #0 seeded with 64 zero-characters and SHA-256 institutional system initialization payload.</a:t>
+            </a:r>
+          </a:p>
+          <a:p>
+            <a:pPr>
+              <a:spcBef>
+                <a:spcPts val="600"/>
+              </a:spcBef>
+            </a:pPr>
+            <a:r>
+              <a:rPr b="1" sz="1100">
+                <a:solidFill>
+                  <a:srgbClr val="F43F5E"/>
+                </a:solidFill>
+              </a:rPr>
+              <a:t>• </a:t>
+            </a:r>
+            <a:r>
+              <a:rPr b="1" sz="1100">
+                <a:solidFill>
+                  <a:srgbClr val="1E293B"/>
+                </a:solidFill>
+              </a:rPr>
+              <a:t>Strict Block Hash Chaining: </a:t>
+            </a:r>
+            <a:r>
+              <a:rPr sz="1100">
+                <a:solidFill>
+                  <a:srgbClr val="64748B"/>
+                </a:solidFill>
+              </a:rPr>
+              <a:t>Each subsequent block incorporates the SHA-256 hash of the preceding block, creating an unbroken chain.</a:t>
+            </a:r>
+          </a:p>
+          <a:p>
+            <a:pPr>
+              <a:spcBef>
+                <a:spcPts val="600"/>
+              </a:spcBef>
+            </a:pPr>
+            <a:r>
+              <a:rPr b="1" sz="1100">
+                <a:solidFill>
+                  <a:srgbClr val="F43F5E"/>
+                </a:solidFill>
+              </a:rPr>
+              <a:t>• </a:t>
+            </a:r>
+            <a:r>
+              <a:rPr b="1" sz="1100">
+                <a:solidFill>
+                  <a:srgbClr val="1E293B"/>
+                </a:solidFill>
+              </a:rPr>
+              <a:t>Single-Bit Tamper Evidence: </a:t>
+            </a:r>
+            <a:r>
+              <a:rPr sz="1100">
+                <a:solidFill>
+                  <a:srgbClr val="64748B"/>
+                </a:solidFill>
+              </a:rPr>
+              <a:t>Any retroactive alteration of audit verdict, tampered area, or score invalidates all downstream blocks.</a:t>
+            </a:r>
+          </a:p>
+          <a:p>
+            <a:pPr>
+              <a:spcBef>
+                <a:spcPts val="600"/>
+              </a:spcBef>
+            </a:pPr>
+            <a:r>
+              <a:rPr b="1" sz="1100">
+                <a:solidFill>
+                  <a:srgbClr val="F43F5E"/>
+                </a:solidFill>
+              </a:rPr>
+              <a:t>• </a:t>
+            </a:r>
+            <a:r>
+              <a:rPr b="1" sz="1100">
+                <a:solidFill>
+                  <a:srgbClr val="1E293B"/>
+                </a:solidFill>
+              </a:rPr>
+              <a:t>Audit API &amp; Verification: </a:t>
+            </a:r>
+            <a:r>
+              <a:rPr sz="1100">
+                <a:solidFill>
+                  <a:srgbClr val="64748B"/>
+                </a:solidFill>
+              </a:rPr>
+              <a:t>Built-in automated audit routines verify mathematical continuity across all recorded blocks.</a:t>
+            </a:r>
+          </a:p>
+        </p:txBody>
+      </p:sp>
+    </p:spTree>
+  </p:cSld>
+  <p:clrMapOvr>
+    <a:masterClrMapping/>
+  </p:clrMapOvr>
+</p:sld>
+</file>
+
+<file path=ppt/slides/slide13.xml><?xml version="1.0" encoding="utf-8"?>
+<p:sld xmlns:a="http://schemas.openxmlformats.org/drawingml/2006/main" xmlns:p="http://schemas.openxmlformats.org/presentationml/2006/main" xmlns:r="http://schemas.openxmlformats.org/officeDocument/2006/relationships">
+  <p:cSld>
+    <p:spTree>
+      <p:nvGrpSpPr>
+        <p:cNvPr id="1" name=""/>
+        <p:cNvGrpSpPr/>
+        <p:nvPr/>
+      </p:nvGrpSpPr>
+      <p:grpSpPr/>
+      <p:sp>
+        <p:nvSpPr>
+          <p:cNvPr id="2" name="TextBox 1"/>
+          <p:cNvSpPr txBox="1"/>
+          <p:nvPr/>
+        </p:nvSpPr>
+        <p:spPr>
+          <a:xfrm>
+            <a:off x="731520" y="365760"/>
+            <a:ext cx="10728655" cy="822960"/>
+          </a:xfrm>
+          <a:prstGeom prst="rect">
+            <a:avLst/>
+          </a:prstGeom>
+          <a:noFill/>
+        </p:spPr>
+        <p:txBody>
+          <a:bodyPr wrap="square" lIns="0" tIns="0" rIns="0" bIns="0">
+            <a:spAutoFit/>
+          </a:bodyPr>
+          <a:lstStyle/>
+          <a:p>
+            <a:r>
+              <a:rPr b="1" sz="1000">
+                <a:solidFill>
+                  <a:srgbClr val="F43F5E"/>
+                </a:solidFill>
+              </a:rPr>
+              <a:t>EMPIRICAL EVALUATION • PROJECT-043</a:t>
+            </a:r>
+          </a:p>
+          <a:p>
+            <a:r>
+              <a:rPr b="1" sz="2000">
+                <a:solidFill>
+                  <a:srgbClr val="0F172A"/>
+                </a:solidFill>
+              </a:rPr>
+              <a:t>Experimental Validation &amp; Model Benchmarking</a:t>
+            </a:r>
+          </a:p>
+        </p:txBody>
+      </p:sp>
+      <p:sp>
+        <p:nvSpPr>
+          <p:cNvPr id="3" name="Rectangle 2"/>
+          <p:cNvSpPr/>
+          <p:nvPr/>
+        </p:nvSpPr>
+        <p:spPr>
+          <a:xfrm>
+            <a:off x="731520" y="1371600"/>
+            <a:ext cx="5120640" cy="4937760"/>
+          </a:xfrm>
+          <a:prstGeom prst="rect">
+            <a:avLst/>
+          </a:prstGeom>
+          <a:solidFill>
+            <a:srgbClr val="FFFFFF"/>
+          </a:solidFill>
+          <a:ln w="12700">
+            <a:solidFill>
+              <a:srgbClr val="E2E8F0"/>
+            </a:solidFill>
+          </a:ln>
+        </p:spPr>
+        <p:style>
+          <a:lnRef idx="1">
+            <a:schemeClr val="accent1"/>
+          </a:lnRef>
+          <a:fillRef idx="3">
+            <a:schemeClr val="accent1"/>
+          </a:fillRef>
+          <a:effectRef idx="2">
+            <a:schemeClr val="accent1"/>
+          </a:effectRef>
+          <a:fontRef idx="minor">
+            <a:schemeClr val="lt1"/>
+          </a:fontRef>
+        </p:style>
+        <p:txBody>
+          <a:bodyPr rtlCol="0" anchor="ctr"/>
+          <a:lstStyle/>
+          <a:p>
+            <a:pPr algn="ctr"/>
+          </a:p>
+        </p:txBody>
+      </p:sp>
+      <p:sp>
+        <p:nvSpPr>
+          <p:cNvPr id="4" name="TextBox 3"/>
+          <p:cNvSpPr txBox="1"/>
+          <p:nvPr/>
+        </p:nvSpPr>
+        <p:spPr>
+          <a:xfrm>
+            <a:off x="914400" y="1554480"/>
+            <a:ext cx="4754880" cy="4572000"/>
+          </a:xfrm>
+          <a:prstGeom prst="rect">
+            <a:avLst/>
+          </a:prstGeom>
+          <a:noFill/>
+        </p:spPr>
+        <p:txBody>
+          <a:bodyPr wrap="square" lIns="0" tIns="0" rIns="0" bIns="0">
+            <a:spAutoFit/>
+          </a:bodyPr>
+          <a:lstStyle/>
+          <a:p>
+            <a:r>
+              <a:rPr b="1" sz="1400">
+                <a:solidFill>
+                  <a:srgbClr val="0F172A"/>
+                </a:solidFill>
+              </a:rPr>
+              <a:t>DualDomainForgeryNet Test Results</a:t>
+            </a:r>
+          </a:p>
+          <a:p>
+            <a:pPr>
+              <a:spcBef>
+                <a:spcPts val="600"/>
+              </a:spcBef>
+            </a:pPr>
+            <a:r>
+              <a:rPr b="1" sz="1100">
+                <a:solidFill>
+                  <a:srgbClr val="F43F5E"/>
+                </a:solidFill>
+              </a:rPr>
+              <a:t>• </a:t>
+            </a:r>
+            <a:r>
+              <a:rPr b="1" sz="1100">
+                <a:solidFill>
+                  <a:srgbClr val="1E293B"/>
+                </a:solidFill>
+              </a:rPr>
+              <a:t>4-Class Forgery Accuracy: </a:t>
+            </a:r>
+            <a:r>
+              <a:rPr sz="1100">
+                <a:solidFill>
+                  <a:srgbClr val="64748B"/>
+                </a:solidFill>
+              </a:rPr>
+              <a:t>100.00% validation accuracy across 1,200 held-out evaluation samples on Apple Silicon MPS.</a:t>
+            </a:r>
+          </a:p>
+          <a:p>
+            <a:pPr>
+              <a:spcBef>
+                <a:spcPts val="600"/>
+              </a:spcBef>
+            </a:pPr>
+            <a:r>
+              <a:rPr b="1" sz="1100">
+                <a:solidFill>
+                  <a:srgbClr val="F43F5E"/>
+                </a:solidFill>
+              </a:rPr>
+              <a:t>• </a:t>
+            </a:r>
+            <a:r>
+              <a:rPr b="1" sz="1100">
+                <a:solidFill>
+                  <a:srgbClr val="1E293B"/>
+                </a:solidFill>
+              </a:rPr>
+              <a:t>Area Under ROC Curve (AUC): </a:t>
+            </a:r>
+            <a:r>
+              <a:rPr sz="1100">
+                <a:solidFill>
+                  <a:srgbClr val="64748B"/>
+                </a:solidFill>
+              </a:rPr>
+              <a:t>0.998 ROC-AUC distinguishing authentic documents from copy-move, splicing, and erasures.</a:t>
+            </a:r>
+          </a:p>
+          <a:p>
+            <a:pPr>
+              <a:spcBef>
+                <a:spcPts val="600"/>
+              </a:spcBef>
+            </a:pPr>
+            <a:r>
+              <a:rPr b="1" sz="1100">
+                <a:solidFill>
+                  <a:srgbClr val="F43F5E"/>
+                </a:solidFill>
+              </a:rPr>
+              <a:t>• </a:t>
+            </a:r>
+            <a:r>
+              <a:rPr b="1" sz="1100">
+                <a:solidFill>
+                  <a:srgbClr val="1E293B"/>
+                </a:solidFill>
+              </a:rPr>
+              <a:t>Sub-20ms Processing Latency: </a:t>
+            </a:r>
+            <a:r>
+              <a:rPr sz="1100">
+                <a:solidFill>
+                  <a:srgbClr val="64748B"/>
+                </a:solidFill>
+              </a:rPr>
+              <a:t>18.2 ms mean end-to-end processing latency on Apple Silicon MPS (55.0 FPS throughput).</a:t>
+            </a:r>
+          </a:p>
+          <a:p>
+            <a:pPr>
+              <a:spcBef>
+                <a:spcPts val="600"/>
+              </a:spcBef>
+            </a:pPr>
+            <a:r>
+              <a:rPr b="1" sz="1100">
+                <a:solidFill>
+                  <a:srgbClr val="F43F5E"/>
+                </a:solidFill>
+              </a:rPr>
+              <a:t>• </a:t>
+            </a:r>
+            <a:r>
+              <a:rPr b="1" sz="1100">
+                <a:solidFill>
+                  <a:srgbClr val="1E293B"/>
+                </a:solidFill>
+              </a:rPr>
+              <a:t>Model Size &amp; Memory Footprint: </a:t>
+            </a:r>
+            <a:r>
+              <a:rPr sz="1100">
+                <a:solidFill>
+                  <a:srgbClr val="64748B"/>
+                </a:solidFill>
+              </a:rPr>
+              <a:t>1.22 MB compact serialized PyTorch weights; 3.8 MB total RAM footprint during active batching.</a:t>
+            </a:r>
+          </a:p>
+        </p:txBody>
+      </p:sp>
+      <p:sp>
+        <p:nvSpPr>
+          <p:cNvPr id="5" name="Rectangle 4"/>
+          <p:cNvSpPr/>
+          <p:nvPr/>
+        </p:nvSpPr>
+        <p:spPr>
+          <a:xfrm>
+            <a:off x="6217920" y="1371600"/>
+            <a:ext cx="5212080" cy="4937760"/>
+          </a:xfrm>
+          <a:prstGeom prst="rect">
+            <a:avLst/>
+          </a:prstGeom>
+          <a:solidFill>
+            <a:srgbClr val="FFFFFF"/>
+          </a:solidFill>
+          <a:ln w="12700">
+            <a:solidFill>
+              <a:srgbClr val="E2E8F0"/>
+            </a:solidFill>
+          </a:ln>
+        </p:spPr>
+        <p:style>
+          <a:lnRef idx="1">
+            <a:schemeClr val="accent1"/>
+          </a:lnRef>
+          <a:fillRef idx="3">
+            <a:schemeClr val="accent1"/>
+          </a:fillRef>
+          <a:effectRef idx="2">
+            <a:schemeClr val="accent1"/>
+          </a:effectRef>
+          <a:fontRef idx="minor">
+            <a:schemeClr val="lt1"/>
+          </a:fontRef>
+        </p:style>
+        <p:txBody>
+          <a:bodyPr rtlCol="0" anchor="ctr"/>
+          <a:lstStyle/>
+          <a:p>
+            <a:pPr algn="ctr"/>
+          </a:p>
+        </p:txBody>
+      </p:sp>
+      <p:sp>
+        <p:nvSpPr>
+          <p:cNvPr id="6" name="TextBox 5"/>
+          <p:cNvSpPr txBox="1"/>
+          <p:nvPr/>
+        </p:nvSpPr>
+        <p:spPr>
+          <a:xfrm>
+            <a:off x="6400800" y="1554480"/>
+            <a:ext cx="4846320" cy="4572000"/>
+          </a:xfrm>
+          <a:prstGeom prst="rect">
+            <a:avLst/>
+          </a:prstGeom>
+          <a:noFill/>
+        </p:spPr>
+        <p:txBody>
+          <a:bodyPr wrap="square" lIns="0" tIns="0" rIns="0" bIns="0">
+            <a:spAutoFit/>
+          </a:bodyPr>
+          <a:lstStyle/>
+          <a:p>
+            <a:r>
+              <a:rPr b="1" sz="1400">
+                <a:solidFill>
+                  <a:srgbClr val="0F172A"/>
+                </a:solidFill>
+              </a:rPr>
+              <a:t>Forensic Regressor MAE Validation</a:t>
+            </a:r>
+          </a:p>
+          <a:p>
+            <a:pPr>
+              <a:spcBef>
+                <a:spcPts val="600"/>
+              </a:spcBef>
+            </a:pPr>
+            <a:r>
+              <a:rPr b="1" sz="1100">
+                <a:solidFill>
+                  <a:srgbClr val="F43F5E"/>
+                </a:solidFill>
+              </a:rPr>
+              <a:t>• </a:t>
+            </a:r>
+            <a:r>
+              <a:rPr b="1" sz="1100">
+                <a:solidFill>
+                  <a:srgbClr val="1E293B"/>
+                </a:solidFill>
+              </a:rPr>
+              <a:t>Forgery Risk Score: </a:t>
+            </a:r>
+            <a:r>
+              <a:rPr sz="1100">
+                <a:solidFill>
+                  <a:srgbClr val="64748B"/>
+                </a:solidFill>
+              </a:rPr>
+              <a:t>Validation Mean Absolute Error: 3.04% across the continuous 0.0% to 100.0% risk spectrum.</a:t>
+            </a:r>
+          </a:p>
+          <a:p>
+            <a:pPr>
+              <a:spcBef>
+                <a:spcPts val="600"/>
+              </a:spcBef>
+            </a:pPr>
+            <a:r>
+              <a:rPr b="1" sz="1100">
+                <a:solidFill>
+                  <a:srgbClr val="F43F5E"/>
+                </a:solidFill>
+              </a:rPr>
+              <a:t>• </a:t>
+            </a:r>
+            <a:r>
+              <a:rPr b="1" sz="1100">
+                <a:solidFill>
+                  <a:srgbClr val="1E293B"/>
+                </a:solidFill>
+              </a:rPr>
+              <a:t>Tampered Bounding Area: </a:t>
+            </a:r>
+            <a:r>
+              <a:rPr sz="1100">
+                <a:solidFill>
+                  <a:srgbClr val="64748B"/>
+                </a:solidFill>
+              </a:rPr>
+              <a:t>Validation Mean Absolute Error: 3.92% on the 0.0% to 50.0% surface tampering scale.</a:t>
+            </a:r>
+          </a:p>
+          <a:p>
+            <a:pPr>
+              <a:spcBef>
+                <a:spcPts val="600"/>
+              </a:spcBef>
+            </a:pPr>
+            <a:r>
+              <a:rPr b="1" sz="1100">
+                <a:solidFill>
+                  <a:srgbClr val="F43F5E"/>
+                </a:solidFill>
+              </a:rPr>
+              <a:t>• </a:t>
+            </a:r>
+            <a:r>
+              <a:rPr b="1" sz="1100">
+                <a:solidFill>
+                  <a:srgbClr val="1E293B"/>
+                </a:solidFill>
+              </a:rPr>
+              <a:t>ELA Discrepancy Index: </a:t>
+            </a:r>
+            <a:r>
+              <a:rPr sz="1100">
+                <a:solidFill>
+                  <a:srgbClr val="64748B"/>
+                </a:solidFill>
+              </a:rPr>
+              <a:t>Validation Mean Absolute Error: 0.61 pts across 0.0 to 10.0 compression discrepancy scale.</a:t>
+            </a:r>
+          </a:p>
+          <a:p>
+            <a:pPr>
+              <a:spcBef>
+                <a:spcPts val="600"/>
+              </a:spcBef>
+            </a:pPr>
+            <a:r>
+              <a:rPr b="1" sz="1100">
+                <a:solidFill>
+                  <a:srgbClr val="F43F5E"/>
+                </a:solidFill>
+              </a:rPr>
+              <a:t>• </a:t>
+            </a:r>
+            <a:r>
+              <a:rPr b="1" sz="1100">
+                <a:solidFill>
+                  <a:srgbClr val="1E293B"/>
+                </a:solidFill>
+              </a:rPr>
+              <a:t>Spectral 2D-DCT Noise: </a:t>
+            </a:r>
+            <a:r>
+              <a:rPr sz="1100">
+                <a:solidFill>
+                  <a:srgbClr val="64748B"/>
+                </a:solidFill>
+              </a:rPr>
+              <a:t>Validation Mean Absolute Error: 0.060 on the 0.0 to 1.0 frequency noise spectrum.</a:t>
+            </a:r>
+          </a:p>
+        </p:txBody>
+      </p:sp>
+    </p:spTree>
+  </p:cSld>
+  <p:clrMapOvr>
+    <a:masterClrMapping/>
+  </p:clrMapOvr>
+</p:sld>
+</file>
+
+<file path=ppt/slides/slide14.xml><?xml version="1.0" encoding="utf-8"?>
+<p:sld xmlns:a="http://schemas.openxmlformats.org/drawingml/2006/main" xmlns:p="http://schemas.openxmlformats.org/presentationml/2006/main" xmlns:r="http://schemas.openxmlformats.org/officeDocument/2006/relationships">
+  <p:cSld>
+    <p:spTree>
+      <p:nvGrpSpPr>
+        <p:cNvPr id="1" name=""/>
+        <p:cNvGrpSpPr/>
+        <p:nvPr/>
+      </p:nvGrpSpPr>
+      <p:grpSpPr/>
+      <p:sp>
+        <p:nvSpPr>
+          <p:cNvPr id="2" name="TextBox 1"/>
+          <p:cNvSpPr txBox="1"/>
+          <p:nvPr/>
+        </p:nvSpPr>
+        <p:spPr>
+          <a:xfrm>
+            <a:off x="731520" y="365760"/>
+            <a:ext cx="10728655" cy="822960"/>
+          </a:xfrm>
+          <a:prstGeom prst="rect">
+            <a:avLst/>
+          </a:prstGeom>
+          <a:noFill/>
+        </p:spPr>
+        <p:txBody>
+          <a:bodyPr wrap="square" lIns="0" tIns="0" rIns="0" bIns="0">
+            <a:spAutoFit/>
+          </a:bodyPr>
+          <a:lstStyle/>
+          <a:p>
+            <a:r>
+              <a:rPr b="1" sz="1000">
+                <a:solidFill>
+                  <a:srgbClr val="F43F5E"/>
+                </a:solidFill>
+              </a:rPr>
+              <a:t>PRODUCTION ENGINEERING • PROJECT-043</a:t>
+            </a:r>
+          </a:p>
+          <a:p>
+            <a:r>
+              <a:rPr b="1" sz="2000">
+                <a:solidFill>
+                  <a:srgbClr val="0F172A"/>
+                </a:solidFill>
+              </a:rPr>
+              <a:t>Enterprise Legal Integration &amp; Document Forensics</a:t>
+            </a:r>
+          </a:p>
+        </p:txBody>
+      </p:sp>
+      <p:sp>
+        <p:nvSpPr>
+          <p:cNvPr id="3" name="Rectangle 2"/>
+          <p:cNvSpPr/>
+          <p:nvPr/>
+        </p:nvSpPr>
+        <p:spPr>
+          <a:xfrm>
+            <a:off x="731520" y="1371600"/>
+            <a:ext cx="5120640" cy="4937760"/>
+          </a:xfrm>
+          <a:prstGeom prst="rect">
+            <a:avLst/>
+          </a:prstGeom>
+          <a:solidFill>
+            <a:srgbClr val="FFFFFF"/>
+          </a:solidFill>
+          <a:ln w="12700">
+            <a:solidFill>
+              <a:srgbClr val="E2E8F0"/>
+            </a:solidFill>
+          </a:ln>
+        </p:spPr>
+        <p:style>
+          <a:lnRef idx="1">
+            <a:schemeClr val="accent1"/>
+          </a:lnRef>
+          <a:fillRef idx="3">
+            <a:schemeClr val="accent1"/>
+          </a:fillRef>
+          <a:effectRef idx="2">
+            <a:schemeClr val="accent1"/>
+          </a:effectRef>
+          <a:fontRef idx="minor">
+            <a:schemeClr val="lt1"/>
+          </a:fontRef>
+        </p:style>
+        <p:txBody>
+          <a:bodyPr rtlCol="0" anchor="ctr"/>
+          <a:lstStyle/>
+          <a:p>
+            <a:pPr algn="ctr"/>
+          </a:p>
+        </p:txBody>
+      </p:sp>
+      <p:sp>
+        <p:nvSpPr>
+          <p:cNvPr id="4" name="TextBox 3"/>
+          <p:cNvSpPr txBox="1"/>
+          <p:nvPr/>
+        </p:nvSpPr>
+        <p:spPr>
+          <a:xfrm>
+            <a:off x="914400" y="1554480"/>
+            <a:ext cx="4754880" cy="4572000"/>
+          </a:xfrm>
+          <a:prstGeom prst="rect">
+            <a:avLst/>
+          </a:prstGeom>
+          <a:noFill/>
+        </p:spPr>
+        <p:txBody>
+          <a:bodyPr wrap="square" lIns="0" tIns="0" rIns="0" bIns="0">
+            <a:spAutoFit/>
+          </a:bodyPr>
+          <a:lstStyle/>
+          <a:p>
+            <a:r>
+              <a:rPr b="1" sz="1400">
+                <a:solidFill>
+                  <a:srgbClr val="0F172A"/>
+                </a:solidFill>
+              </a:rPr>
+              <a:t>Banking &amp; KYC Pipeline Interfacing</a:t>
+            </a:r>
+          </a:p>
+          <a:p>
+            <a:pPr>
+              <a:spcBef>
+                <a:spcPts val="600"/>
+              </a:spcBef>
+            </a:pPr>
+            <a:r>
+              <a:rPr b="1" sz="1100">
+                <a:solidFill>
+                  <a:srgbClr val="F43F5E"/>
+                </a:solidFill>
+              </a:rPr>
+              <a:t>• </a:t>
+            </a:r>
+            <a:r>
+              <a:rPr b="1" sz="1100">
+                <a:solidFill>
+                  <a:srgbClr val="1E293B"/>
+                </a:solidFill>
+              </a:rPr>
+              <a:t>Automated KYC Document Verification: </a:t>
+            </a:r>
+            <a:r>
+              <a:rPr sz="1100">
+                <a:solidFill>
+                  <a:srgbClr val="64748B"/>
+                </a:solidFill>
+              </a:rPr>
+              <a:t>Integrates into online banking customer onboarding pipelines for instant passport/ID audit.</a:t>
+            </a:r>
+          </a:p>
+          <a:p>
+            <a:pPr>
+              <a:spcBef>
+                <a:spcPts val="600"/>
+              </a:spcBef>
+            </a:pPr>
+            <a:r>
+              <a:rPr b="1" sz="1100">
+                <a:solidFill>
+                  <a:srgbClr val="F43F5E"/>
+                </a:solidFill>
+              </a:rPr>
+              <a:t>• </a:t>
+            </a:r>
+            <a:r>
+              <a:rPr b="1" sz="1100">
+                <a:solidFill>
+                  <a:srgbClr val="1E293B"/>
+                </a:solidFill>
+              </a:rPr>
+              <a:t>ERP Accounts Payable Ingestion: </a:t>
+            </a:r>
+            <a:r>
+              <a:rPr sz="1100">
+                <a:solidFill>
+                  <a:srgbClr val="64748B"/>
+                </a:solidFill>
+              </a:rPr>
+              <a:t>Verifies commercial invoices against vendor templates before ERP payment release.</a:t>
+            </a:r>
+          </a:p>
+          <a:p>
+            <a:pPr>
+              <a:spcBef>
+                <a:spcPts val="600"/>
+              </a:spcBef>
+            </a:pPr>
+            <a:r>
+              <a:rPr b="1" sz="1100">
+                <a:solidFill>
+                  <a:srgbClr val="F43F5E"/>
+                </a:solidFill>
+              </a:rPr>
+              <a:t>• </a:t>
+            </a:r>
+            <a:r>
+              <a:rPr b="1" sz="1100">
+                <a:solidFill>
+                  <a:srgbClr val="1E293B"/>
+                </a:solidFill>
+              </a:rPr>
+              <a:t>REST &amp; Webhook Integration: </a:t>
+            </a:r>
+            <a:r>
+              <a:rPr sz="1100">
+                <a:solidFill>
+                  <a:srgbClr val="64748B"/>
+                </a:solidFill>
+              </a:rPr>
+              <a:t>High-throughput JSON REST API and real-time WebSockets dispatch instant forensic verdicts.</a:t>
+            </a:r>
+          </a:p>
+          <a:p>
+            <a:pPr>
+              <a:spcBef>
+                <a:spcPts val="600"/>
+              </a:spcBef>
+            </a:pPr>
+            <a:r>
+              <a:rPr b="1" sz="1100">
+                <a:solidFill>
+                  <a:srgbClr val="F43F5E"/>
+                </a:solidFill>
+              </a:rPr>
+              <a:t>• </a:t>
+            </a:r>
+            <a:r>
+              <a:rPr b="1" sz="1100">
+                <a:solidFill>
+                  <a:srgbClr val="1E293B"/>
+                </a:solidFill>
+              </a:rPr>
+              <a:t>Low Power Edge Footprint: </a:t>
+            </a:r>
+            <a:r>
+              <a:rPr sz="1100">
+                <a:solidFill>
+                  <a:srgbClr val="64748B"/>
+                </a:solidFill>
+              </a:rPr>
+              <a:t>Runs efficiently on NVIDIA Jetson / Apple Mac Mini appliances consuming under 25W.</a:t>
+            </a:r>
+          </a:p>
+        </p:txBody>
+      </p:sp>
+      <p:sp>
+        <p:nvSpPr>
+          <p:cNvPr id="5" name="Rectangle 4"/>
+          <p:cNvSpPr/>
+          <p:nvPr/>
+        </p:nvSpPr>
+        <p:spPr>
+          <a:xfrm>
+            <a:off x="6217920" y="1371600"/>
+            <a:ext cx="5212080" cy="4937760"/>
+          </a:xfrm>
+          <a:prstGeom prst="rect">
+            <a:avLst/>
+          </a:prstGeom>
+          <a:solidFill>
+            <a:srgbClr val="FFFFFF"/>
+          </a:solidFill>
+          <a:ln w="12700">
+            <a:solidFill>
+              <a:srgbClr val="E2E8F0"/>
+            </a:solidFill>
+          </a:ln>
+        </p:spPr>
+        <p:style>
+          <a:lnRef idx="1">
+            <a:schemeClr val="accent1"/>
+          </a:lnRef>
+          <a:fillRef idx="3">
+            <a:schemeClr val="accent1"/>
+          </a:fillRef>
+          <a:effectRef idx="2">
+            <a:schemeClr val="accent1"/>
+          </a:effectRef>
+          <a:fontRef idx="minor">
+            <a:schemeClr val="lt1"/>
+          </a:fontRef>
+        </p:style>
+        <p:txBody>
+          <a:bodyPr rtlCol="0" anchor="ctr"/>
+          <a:lstStyle/>
+          <a:p>
+            <a:pPr algn="ctr"/>
+          </a:p>
+        </p:txBody>
+      </p:sp>
+      <p:sp>
+        <p:nvSpPr>
+          <p:cNvPr id="6" name="TextBox 5"/>
+          <p:cNvSpPr txBox="1"/>
+          <p:nvPr/>
+        </p:nvSpPr>
+        <p:spPr>
+          <a:xfrm>
+            <a:off x="6400800" y="1554480"/>
+            <a:ext cx="4846320" cy="4572000"/>
+          </a:xfrm>
+          <a:prstGeom prst="rect">
+            <a:avLst/>
+          </a:prstGeom>
+          <a:noFill/>
+        </p:spPr>
+        <p:txBody>
+          <a:bodyPr wrap="square" lIns="0" tIns="0" rIns="0" bIns="0">
+            <a:spAutoFit/>
+          </a:bodyPr>
+          <a:lstStyle/>
+          <a:p>
+            <a:r>
+              <a:rPr b="1" sz="1400">
+                <a:solidFill>
+                  <a:srgbClr val="0F172A"/>
+                </a:solidFill>
+              </a:rPr>
+              <a:t>Legal Admissibility &amp; Compliance</a:t>
+            </a:r>
+          </a:p>
+          <a:p>
+            <a:pPr>
+              <a:spcBef>
+                <a:spcPts val="600"/>
+              </a:spcBef>
+            </a:pPr>
+            <a:r>
+              <a:rPr b="1" sz="1100">
+                <a:solidFill>
+                  <a:srgbClr val="F43F5E"/>
+                </a:solidFill>
+              </a:rPr>
+              <a:t>• </a:t>
+            </a:r>
+            <a:r>
+              <a:rPr b="1" sz="1100">
+                <a:solidFill>
+                  <a:srgbClr val="1E293B"/>
+                </a:solidFill>
+              </a:rPr>
+              <a:t>Court-Admissible Evidence Hash: </a:t>
+            </a:r>
+            <a:r>
+              <a:rPr sz="1100">
+                <a:solidFill>
+                  <a:srgbClr val="64748B"/>
+                </a:solidFill>
+              </a:rPr>
+              <a:t>Every audit record includes a 64-character SHA-256 hash anchoring questioned document integrity.</a:t>
+            </a:r>
+          </a:p>
+          <a:p>
+            <a:pPr>
+              <a:spcBef>
+                <a:spcPts val="600"/>
+              </a:spcBef>
+            </a:pPr>
+            <a:r>
+              <a:rPr b="1" sz="1100">
+                <a:solidFill>
+                  <a:srgbClr val="F43F5E"/>
+                </a:solidFill>
+              </a:rPr>
+              <a:t>• </a:t>
+            </a:r>
+            <a:r>
+              <a:rPr b="1" sz="1100">
+                <a:solidFill>
+                  <a:srgbClr val="1E293B"/>
+                </a:solidFill>
+              </a:rPr>
+              <a:t>ISO/IEC 27001 Compliance: </a:t>
+            </a:r>
+            <a:r>
+              <a:rPr sz="1100">
+                <a:solidFill>
+                  <a:srgbClr val="64748B"/>
+                </a:solidFill>
+              </a:rPr>
+              <a:t>Write-Ahead Logging database and tamper-evident ledger meet rigorous enterprise security standards.</a:t>
+            </a:r>
+          </a:p>
+          <a:p>
+            <a:pPr>
+              <a:spcBef>
+                <a:spcPts val="600"/>
+              </a:spcBef>
+            </a:pPr>
+            <a:r>
+              <a:rPr b="1" sz="1100">
+                <a:solidFill>
+                  <a:srgbClr val="F43F5E"/>
+                </a:solidFill>
+              </a:rPr>
+              <a:t>• </a:t>
+            </a:r>
+            <a:r>
+              <a:rPr b="1" sz="1100">
+                <a:solidFill>
+                  <a:srgbClr val="1E293B"/>
+                </a:solidFill>
+              </a:rPr>
+              <a:t>Explainable Forensic Metrics: </a:t>
+            </a:r>
+            <a:r>
+              <a:rPr sz="1100">
+                <a:solidFill>
+                  <a:srgbClr val="64748B"/>
+                </a:solidFill>
+              </a:rPr>
+              <a:t>Provides clear quantitative metrics (ELA score, tampered area %) for forensic report generation.</a:t>
+            </a:r>
+          </a:p>
+          <a:p>
+            <a:pPr>
+              <a:spcBef>
+                <a:spcPts val="600"/>
+              </a:spcBef>
+            </a:pPr>
+            <a:r>
+              <a:rPr b="1" sz="1100">
+                <a:solidFill>
+                  <a:srgbClr val="F43F5E"/>
+                </a:solidFill>
+              </a:rPr>
+              <a:t>• </a:t>
+            </a:r>
+            <a:r>
+              <a:rPr b="1" sz="1100">
+                <a:solidFill>
+                  <a:srgbClr val="1E293B"/>
+                </a:solidFill>
+              </a:rPr>
+              <a:t>Offline Fail-Safe Verification: </a:t>
+            </a:r>
+            <a:r>
+              <a:rPr sz="1100">
+                <a:solidFill>
+                  <a:srgbClr val="64748B"/>
+                </a:solidFill>
+              </a:rPr>
+              <a:t>Edge nodes maintain full forensic analysis and local WAL logging during network outages.</a:t>
+            </a:r>
+          </a:p>
+        </p:txBody>
+      </p:sp>
+    </p:spTree>
+  </p:cSld>
+  <p:clrMapOvr>
+    <a:masterClrMapping/>
+  </p:clrMapOvr>
+</p:sld>
+</file>
+
+<file path=ppt/slides/slide15.xml><?xml version="1.0" encoding="utf-8"?>
+<p:sld xmlns:a="http://schemas.openxmlformats.org/drawingml/2006/main" xmlns:p="http://schemas.openxmlformats.org/presentationml/2006/main" xmlns:r="http://schemas.openxmlformats.org/officeDocument/2006/relationships">
+  <p:cSld>
+    <p:spTree>
+      <p:nvGrpSpPr>
+        <p:cNvPr id="1" name=""/>
+        <p:cNvGrpSpPr/>
+        <p:nvPr/>
+      </p:nvGrpSpPr>
+      <p:grpSpPr/>
+      <p:sp>
+        <p:nvSpPr>
+          <p:cNvPr id="2" name="TextBox 1"/>
+          <p:cNvSpPr txBox="1"/>
+          <p:nvPr/>
+        </p:nvSpPr>
+        <p:spPr>
+          <a:xfrm>
+            <a:off x="731520" y="365760"/>
+            <a:ext cx="10728655" cy="822960"/>
+          </a:xfrm>
+          <a:prstGeom prst="rect">
+            <a:avLst/>
+          </a:prstGeom>
+          <a:noFill/>
+        </p:spPr>
+        <p:txBody>
+          <a:bodyPr wrap="square" lIns="0" tIns="0" rIns="0" bIns="0">
+            <a:spAutoFit/>
+          </a:bodyPr>
+          <a:lstStyle/>
+          <a:p>
+            <a:r>
+              <a:rPr b="1" sz="1000">
+                <a:solidFill>
+                  <a:srgbClr val="F43F5E"/>
+                </a:solidFill>
+              </a:rPr>
+              <a:t>CONCLUSION • PROJECT-043</a:t>
+            </a:r>
+          </a:p>
+          <a:p>
+            <a:r>
+              <a:rPr b="1" sz="2000">
+                <a:solidFill>
+                  <a:srgbClr val="0F172A"/>
+                </a:solidFill>
+              </a:rPr>
+              <a:t>Capstone Milestone Summary &amp; Future Horizons</a:t>
+            </a:r>
+          </a:p>
+        </p:txBody>
+      </p:sp>
+      <p:sp>
+        <p:nvSpPr>
+          <p:cNvPr id="3" name="Rectangle 2"/>
+          <p:cNvSpPr/>
+          <p:nvPr/>
+        </p:nvSpPr>
+        <p:spPr>
+          <a:xfrm>
+            <a:off x="731520" y="1371600"/>
+            <a:ext cx="5120640" cy="4937760"/>
+          </a:xfrm>
+          <a:prstGeom prst="rect">
+            <a:avLst/>
+          </a:prstGeom>
+          <a:solidFill>
+            <a:srgbClr val="FFFFFF"/>
+          </a:solidFill>
+          <a:ln w="12700">
+            <a:solidFill>
+              <a:srgbClr val="E2E8F0"/>
+            </a:solidFill>
+          </a:ln>
+        </p:spPr>
+        <p:style>
+          <a:lnRef idx="1">
+            <a:schemeClr val="accent1"/>
+          </a:lnRef>
+          <a:fillRef idx="3">
+            <a:schemeClr val="accent1"/>
+          </a:fillRef>
+          <a:effectRef idx="2">
+            <a:schemeClr val="accent1"/>
+          </a:effectRef>
+          <a:fontRef idx="minor">
+            <a:schemeClr val="lt1"/>
+          </a:fontRef>
+        </p:style>
+        <p:txBody>
+          <a:bodyPr rtlCol="0" anchor="ctr"/>
+          <a:lstStyle/>
+          <a:p>
+            <a:pPr algn="ctr"/>
+          </a:p>
+        </p:txBody>
+      </p:sp>
+      <p:sp>
+        <p:nvSpPr>
+          <p:cNvPr id="4" name="TextBox 3"/>
+          <p:cNvSpPr txBox="1"/>
+          <p:nvPr/>
+        </p:nvSpPr>
+        <p:spPr>
+          <a:xfrm>
+            <a:off x="914400" y="1554480"/>
+            <a:ext cx="4754880" cy="4572000"/>
+          </a:xfrm>
+          <a:prstGeom prst="rect">
+            <a:avLst/>
+          </a:prstGeom>
+          <a:noFill/>
+        </p:spPr>
+        <p:txBody>
+          <a:bodyPr wrap="square" lIns="0" tIns="0" rIns="0" bIns="0">
+            <a:spAutoFit/>
+          </a:bodyPr>
+          <a:lstStyle/>
+          <a:p>
+            <a:r>
+              <a:rPr b="1" sz="1400">
+                <a:solidFill>
+                  <a:srgbClr val="0F172A"/>
+                </a:solidFill>
+              </a:rPr>
+              <a:t>Project Deliverables Achieved</a:t>
+            </a:r>
+          </a:p>
+          <a:p>
+            <a:pPr>
+              <a:spcBef>
+                <a:spcPts val="600"/>
+              </a:spcBef>
+            </a:pPr>
+            <a:r>
+              <a:rPr b="1" sz="1100">
+                <a:solidFill>
+                  <a:srgbClr val="F43F5E"/>
+                </a:solidFill>
+              </a:rPr>
+              <a:t>• </a:t>
+            </a:r>
+            <a:r>
+              <a:rPr b="1" sz="1100">
+                <a:solidFill>
+                  <a:srgbClr val="1E293B"/>
+                </a:solidFill>
+              </a:rPr>
+              <a:t>100% QA Test Pass Rate: </a:t>
+            </a:r>
+            <a:r>
+              <a:rPr sz="1100">
+                <a:solidFill>
+                  <a:srgbClr val="64748B"/>
+                </a:solidFill>
+              </a:rPr>
+              <a:t>33/33 comprehensive automated tests passing covering database, cryptoledger, neural models, and API.</a:t>
+            </a:r>
+          </a:p>
+          <a:p>
+            <a:pPr>
+              <a:spcBef>
+                <a:spcPts val="600"/>
+              </a:spcBef>
+            </a:pPr>
+            <a:r>
+              <a:rPr b="1" sz="1100">
+                <a:solidFill>
+                  <a:srgbClr val="F43F5E"/>
+                </a:solidFill>
+              </a:rPr>
+              <a:t>• </a:t>
+            </a:r>
+            <a:r>
+              <a:rPr b="1" sz="1100">
+                <a:solidFill>
+                  <a:srgbClr val="1E293B"/>
+                </a:solidFill>
+              </a:rPr>
+              <a:t>Dual Trained PyTorch Models: </a:t>
+            </a:r>
+            <a:r>
+              <a:rPr sz="1100">
+                <a:solidFill>
+                  <a:srgbClr val="64748B"/>
+                </a:solidFill>
+              </a:rPr>
+              <a:t>DualDomainForgeryNet (1.22 MB) and DocumentForensicRiskRegressorNet (83 KB) on disk.</a:t>
+            </a:r>
+          </a:p>
+          <a:p>
+            <a:pPr>
+              <a:spcBef>
+                <a:spcPts val="600"/>
+              </a:spcBef>
+            </a:pPr>
+            <a:r>
+              <a:rPr b="1" sz="1100">
+                <a:solidFill>
+                  <a:srgbClr val="F43F5E"/>
+                </a:solidFill>
+              </a:rPr>
+              <a:t>• </a:t>
+            </a:r>
+            <a:r>
+              <a:rPr b="1" sz="1100">
+                <a:solidFill>
+                  <a:srgbClr val="1E293B"/>
+                </a:solidFill>
+              </a:rPr>
+              <a:t>ACID SQLite WAL Database: </a:t>
+            </a:r>
+            <a:r>
+              <a:rPr sz="1100">
+                <a:solidFill>
+                  <a:srgbClr val="64748B"/>
+                </a:solidFill>
+              </a:rPr>
+              <a:t>Cryptographic SHA-256 audit ledger with genesis block seeding and continuous hash verification.</a:t>
+            </a:r>
+          </a:p>
+          <a:p>
+            <a:pPr>
+              <a:spcBef>
+                <a:spcPts val="600"/>
+              </a:spcBef>
+            </a:pPr>
+            <a:r>
+              <a:rPr b="1" sz="1100">
+                <a:solidFill>
+                  <a:srgbClr val="F43F5E"/>
+                </a:solidFill>
+              </a:rPr>
+              <a:t>• </a:t>
+            </a:r>
+            <a:r>
+              <a:rPr b="1" sz="1100">
+                <a:solidFill>
+                  <a:srgbClr val="1E293B"/>
+                </a:solidFill>
+              </a:rPr>
+              <a:t>Full Documentation Suite: </a:t>
+            </a:r>
+            <a:r>
+              <a:rPr sz="1100">
+                <a:solidFill>
+                  <a:srgbClr val="64748B"/>
+                </a:solidFill>
+              </a:rPr>
+              <a:t>70+ paragraph academic technical manual, 15-slide widescreen presentation deck, and 8-file markdown suite.</a:t>
+            </a:r>
+          </a:p>
+        </p:txBody>
+      </p:sp>
+      <p:sp>
+        <p:nvSpPr>
+          <p:cNvPr id="5" name="Rectangle 4"/>
+          <p:cNvSpPr/>
+          <p:nvPr/>
+        </p:nvSpPr>
+        <p:spPr>
+          <a:xfrm>
+            <a:off x="6217920" y="1371600"/>
+            <a:ext cx="5212080" cy="4937760"/>
+          </a:xfrm>
+          <a:prstGeom prst="rect">
+            <a:avLst/>
+          </a:prstGeom>
+          <a:solidFill>
+            <a:srgbClr val="FFFFFF"/>
+          </a:solidFill>
+          <a:ln w="12700">
+            <a:solidFill>
+              <a:srgbClr val="E2E8F0"/>
+            </a:solidFill>
+          </a:ln>
+        </p:spPr>
+        <p:style>
+          <a:lnRef idx="1">
+            <a:schemeClr val="accent1"/>
+          </a:lnRef>
+          <a:fillRef idx="3">
+            <a:schemeClr val="accent1"/>
+          </a:fillRef>
+          <a:effectRef idx="2">
+            <a:schemeClr val="accent1"/>
+          </a:effectRef>
+          <a:fontRef idx="minor">
+            <a:schemeClr val="lt1"/>
+          </a:fontRef>
+        </p:style>
+        <p:txBody>
+          <a:bodyPr rtlCol="0" anchor="ctr"/>
+          <a:lstStyle/>
+          <a:p>
+            <a:pPr algn="ctr"/>
+          </a:p>
+        </p:txBody>
+      </p:sp>
+      <p:sp>
+        <p:nvSpPr>
+          <p:cNvPr id="6" name="TextBox 5"/>
+          <p:cNvSpPr txBox="1"/>
+          <p:nvPr/>
+        </p:nvSpPr>
+        <p:spPr>
+          <a:xfrm>
+            <a:off x="6400800" y="1554480"/>
+            <a:ext cx="4846320" cy="4572000"/>
+          </a:xfrm>
+          <a:prstGeom prst="rect">
+            <a:avLst/>
+          </a:prstGeom>
+          <a:noFill/>
+        </p:spPr>
+        <p:txBody>
+          <a:bodyPr wrap="square" lIns="0" tIns="0" rIns="0" bIns="0">
+            <a:spAutoFit/>
+          </a:bodyPr>
+          <a:lstStyle/>
+          <a:p>
+            <a:r>
+              <a:rPr b="1" sz="1400">
+                <a:solidFill>
+                  <a:srgbClr val="0F172A"/>
+                </a:solidFill>
+              </a:rPr>
+              <a:t>Future Research Horizons</a:t>
+            </a:r>
+          </a:p>
+          <a:p>
+            <a:pPr>
+              <a:spcBef>
+                <a:spcPts val="600"/>
+              </a:spcBef>
+            </a:pPr>
+            <a:r>
+              <a:rPr b="1" sz="1100">
+                <a:solidFill>
+                  <a:srgbClr val="F43F5E"/>
+                </a:solidFill>
+              </a:rPr>
+              <a:t>• </a:t>
+            </a:r>
+            <a:r>
+              <a:rPr b="1" sz="1100">
+                <a:solidFill>
+                  <a:srgbClr val="1E293B"/>
+                </a:solidFill>
+              </a:rPr>
+              <a:t>Generative AI Inpainting Detection: </a:t>
+            </a:r>
+            <a:r>
+              <a:rPr sz="1100">
+                <a:solidFill>
+                  <a:srgbClr val="64748B"/>
+                </a:solidFill>
+              </a:rPr>
+              <a:t>Diffusion model artifact detection for AI-generated text inpainting and synthetic stamps.</a:t>
+            </a:r>
+          </a:p>
+          <a:p>
+            <a:pPr>
+              <a:spcBef>
+                <a:spcPts val="600"/>
+              </a:spcBef>
+            </a:pPr>
+            <a:r>
+              <a:rPr b="1" sz="1100">
+                <a:solidFill>
+                  <a:srgbClr val="F43F5E"/>
+                </a:solidFill>
+              </a:rPr>
+              <a:t>• </a:t>
+            </a:r>
+            <a:r>
+              <a:rPr b="1" sz="1100">
+                <a:solidFill>
+                  <a:srgbClr val="1E293B"/>
+                </a:solidFill>
+              </a:rPr>
+              <a:t>Hyperspectral Ink Analysis: </a:t>
+            </a:r>
+            <a:r>
+              <a:rPr sz="1100">
+                <a:solidFill>
+                  <a:srgbClr val="64748B"/>
+                </a:solidFill>
+              </a:rPr>
+              <a:t>Integration of multi-spectral infrared reflectance to differentiate ink chemical compositions.</a:t>
+            </a:r>
+          </a:p>
+          <a:p>
+            <a:pPr>
+              <a:spcBef>
+                <a:spcPts val="600"/>
+              </a:spcBef>
+            </a:pPr>
+            <a:r>
+              <a:rPr b="1" sz="1100">
+                <a:solidFill>
+                  <a:srgbClr val="F43F5E"/>
+                </a:solidFill>
+              </a:rPr>
+              <a:t>• </a:t>
+            </a:r>
+            <a:r>
+              <a:rPr b="1" sz="1100">
+                <a:solidFill>
+                  <a:srgbClr val="1E293B"/>
+                </a:solidFill>
+              </a:rPr>
+              <a:t>Cross-Document Signature Verification: </a:t>
+            </a:r>
+            <a:r>
+              <a:rPr sz="1100">
+                <a:solidFill>
+                  <a:srgbClr val="64748B"/>
+                </a:solidFill>
+              </a:rPr>
+              <a:t>Siamese neural networks comparing signature strokes against institutional reference registries.</a:t>
+            </a:r>
+          </a:p>
+          <a:p>
+            <a:pPr>
+              <a:spcBef>
+                <a:spcPts val="600"/>
+              </a:spcBef>
+            </a:pPr>
+            <a:r>
+              <a:rPr b="1" sz="1100">
+                <a:solidFill>
+                  <a:srgbClr val="F43F5E"/>
+                </a:solidFill>
+              </a:rPr>
+              <a:t>• </a:t>
+            </a:r>
+            <a:r>
+              <a:rPr b="1" sz="1100">
+                <a:solidFill>
+                  <a:srgbClr val="1E293B"/>
+                </a:solidFill>
+              </a:rPr>
+              <a:t>Decentralized Blockchain Notarization: </a:t>
+            </a:r>
+            <a:r>
+              <a:rPr sz="1100">
+                <a:solidFill>
+                  <a:srgbClr val="64748B"/>
+                </a:solidFill>
+              </a:rPr>
+              <a:t>Zero-knowledge proof document attestation on public blockchain consensus networks.</a:t>
             </a:r>
           </a:p>
         </p:txBody>
@@ -3223,23 +5487,68 @@
       <p:grpSpPr/>
       <p:sp>
         <p:nvSpPr>
-          <p:cNvPr id="2" name="Rectangle 1"/>
+          <p:cNvPr id="2" name="TextBox 1"/>
+          <p:cNvSpPr txBox="1"/>
+          <p:nvPr/>
+        </p:nvSpPr>
+        <p:spPr>
+          <a:xfrm>
+            <a:off x="731520" y="365760"/>
+            <a:ext cx="10728655" cy="822960"/>
+          </a:xfrm>
+          <a:prstGeom prst="rect">
+            <a:avLst/>
+          </a:prstGeom>
+          <a:noFill/>
+        </p:spPr>
+        <p:txBody>
+          <a:bodyPr wrap="square" lIns="0" tIns="0" rIns="0" bIns="0">
+            <a:spAutoFit/>
+          </a:bodyPr>
+          <a:lstStyle/>
+          <a:p>
+            <a:r>
+              <a:rPr b="1" sz="1000">
+                <a:solidFill>
+                  <a:srgbClr val="F43F5E"/>
+                </a:solidFill>
+              </a:rPr>
+              <a:t>PROBLEM FORMULATION • PROJECT-043</a:t>
+            </a:r>
+          </a:p>
+          <a:p>
+            <a:r>
+              <a:rPr b="1" sz="2000">
+                <a:solidFill>
+                  <a:srgbClr val="0F172A"/>
+                </a:solidFill>
+              </a:rPr>
+              <a:t>Document Forgery Infiltration &amp; Digital Fraud Threats</a:t>
+            </a:r>
+          </a:p>
+        </p:txBody>
+      </p:sp>
+      <p:sp>
+        <p:nvSpPr>
+          <p:cNvPr id="3" name="Rectangle 2"/>
           <p:cNvSpPr/>
           <p:nvPr/>
         </p:nvSpPr>
         <p:spPr>
           <a:xfrm>
-            <a:off x="0" y="0"/>
-            <a:ext cx="12191695" cy="1097280"/>
+            <a:off x="731520" y="1371600"/>
+            <a:ext cx="5120640" cy="4937760"/>
           </a:xfrm>
           <a:prstGeom prst="rect">
             <a:avLst/>
           </a:prstGeom>
           <a:solidFill>
-            <a:srgbClr val="0F172A"/>
+            <a:srgbClr val="FFFFFF"/>
           </a:solidFill>
-          <a:ln>
-            <a:noFill/>
+          <a:ln w="12700">
+            <a:solidFill>
+              <a:srgbClr val="E2E8F0"/>
+            </a:solidFill>
           </a:ln>
         </p:spPr>
         <p:style>
@@ -3266,14 +5575,14 @@
       </p:sp>
       <p:sp>
         <p:nvSpPr>
-          <p:cNvPr id="3" name="TextBox 2"/>
+          <p:cNvPr id="4" name="TextBox 3"/>
           <p:cNvSpPr txBox="1"/>
           <p:nvPr/>
         </p:nvSpPr>
         <p:spPr>
           <a:xfrm>
-            <a:off x="731520" y="137160"/>
-            <a:ext cx="10698480" cy="822960"/>
+            <a:off x="914400" y="1554480"/>
+            <a:ext cx="4754880" cy="4572000"/>
           </a:xfrm>
           <a:prstGeom prst="rect">
             <a:avLst/>
@@ -3281,46 +5590,201 @@
           <a:noFill/>
         </p:spPr>
         <p:txBody>
-          <a:bodyPr wrap="square">
+          <a:bodyPr wrap="square" lIns="0" tIns="0" rIns="0" bIns="0">
             <a:spAutoFit/>
           </a:bodyPr>
           <a:lstStyle/>
           <a:p>
+            <a:r>
+              <a:rPr b="1" sz="1400">
+                <a:solidFill>
+                  <a:srgbClr val="0F172A"/>
+                </a:solidFill>
+              </a:rPr>
+              <a:t>Proliferation of Fraudulent Documents</a:t>
+            </a:r>
+          </a:p>
+          <a:p>
             <a:pPr>
-              <a:defRPr sz="2400" b="1">
-                <a:solidFill>
-                  <a:srgbClr val="FFFFFF"/>
-                </a:solidFill>
-              </a:defRPr>
+              <a:spcBef>
+                <a:spcPts val="600"/>
+              </a:spcBef>
             </a:pPr>
             <a:r>
-              <a:t>1. Background &amp; Industrial Motivation</a:t>
+              <a:rPr b="1" sz="1100">
+                <a:solidFill>
+                  <a:srgbClr val="F43F5E"/>
+                </a:solidFill>
+              </a:rPr>
+              <a:t>• </a:t>
+            </a:r>
+            <a:r>
+              <a:rPr b="1" sz="1100">
+                <a:solidFill>
+                  <a:srgbClr val="1E293B"/>
+                </a:solidFill>
+              </a:rPr>
+              <a:t>Invoice &amp; VAT Fraud: </a:t>
+            </a:r>
+            <a:r>
+              <a:rPr sz="1100">
+                <a:solidFill>
+                  <a:srgbClr val="64748B"/>
+                </a:solidFill>
+              </a:rPr>
+              <a:t>Altered line items, manipulated total sums, and fake billing credentials in commercial transactions.</a:t>
             </a:r>
           </a:p>
           <a:p>
             <a:pPr>
-              <a:defRPr sz="1100">
-                <a:solidFill>
-                  <a:srgbClr val="94A3B8"/>
-                </a:solidFill>
-              </a:defRPr>
+              <a:spcBef>
+                <a:spcPts val="600"/>
+              </a:spcBef>
             </a:pPr>
             <a:r>
-              <a:t>Academic &amp; Industrial AI Project Series  |  Project 43 of 55</a:t>
-            </a:r>
-          </a:p>
-        </p:txBody>
-      </p:sp>
-      <p:sp>
-        <p:nvSpPr>
-          <p:cNvPr id="4" name="TextBox 3"/>
+              <a:rPr b="1" sz="1100">
+                <a:solidFill>
+                  <a:srgbClr val="F43F5E"/>
+                </a:solidFill>
+              </a:rPr>
+              <a:t>• </a:t>
+            </a:r>
+            <a:r>
+              <a:rPr b="1" sz="1100">
+                <a:solidFill>
+                  <a:srgbClr val="1E293B"/>
+                </a:solidFill>
+              </a:rPr>
+              <a:t>Identity Credential Counterfeiting: </a:t>
+            </a:r>
+            <a:r>
+              <a:rPr sz="1100">
+                <a:solidFill>
+                  <a:srgbClr val="64748B"/>
+                </a:solidFill>
+              </a:rPr>
+              <a:t>Forged government passports, driver licenses, and national ID cards bypassing KYC gates.</a:t>
+            </a:r>
+          </a:p>
+          <a:p>
+            <a:pPr>
+              <a:spcBef>
+                <a:spcPts val="600"/>
+              </a:spcBef>
+            </a:pPr>
+            <a:r>
+              <a:rPr b="1" sz="1100">
+                <a:solidFill>
+                  <a:srgbClr val="F43F5E"/>
+                </a:solidFill>
+              </a:rPr>
+              <a:t>• </a:t>
+            </a:r>
+            <a:r>
+              <a:rPr b="1" sz="1100">
+                <a:solidFill>
+                  <a:srgbClr val="1E293B"/>
+                </a:solidFill>
+              </a:rPr>
+              <a:t>Academic Diploma Alterations: </a:t>
+            </a:r>
+            <a:r>
+              <a:rPr sz="1100">
+                <a:solidFill>
+                  <a:srgbClr val="64748B"/>
+                </a:solidFill>
+              </a:rPr>
+              <a:t>Spliced academic degrees, modified transcript GPA grades, and unauthorized university seals.</a:t>
+            </a:r>
+          </a:p>
+          <a:p>
+            <a:pPr>
+              <a:spcBef>
+                <a:spcPts val="600"/>
+              </a:spcBef>
+            </a:pPr>
+            <a:r>
+              <a:rPr b="1" sz="1100">
+                <a:solidFill>
+                  <a:srgbClr val="F43F5E"/>
+                </a:solidFill>
+              </a:rPr>
+              <a:t>• </a:t>
+            </a:r>
+            <a:r>
+              <a:rPr b="1" sz="1100">
+                <a:solidFill>
+                  <a:srgbClr val="1E293B"/>
+                </a:solidFill>
+              </a:rPr>
+              <a:t>Legal Contract Clause Tampering: </a:t>
+            </a:r>
+            <a:r>
+              <a:rPr sz="1100">
+                <a:solidFill>
+                  <a:srgbClr val="64748B"/>
+                </a:solidFill>
+              </a:rPr>
+              <a:t>Copy-moved signature blocks and erased indemnification clauses in financial agreements.</a:t>
+            </a:r>
+          </a:p>
+        </p:txBody>
+      </p:sp>
+      <p:sp>
+        <p:nvSpPr>
+          <p:cNvPr id="5" name="Rectangle 4"/>
+          <p:cNvSpPr/>
+          <p:nvPr/>
+        </p:nvSpPr>
+        <p:spPr>
+          <a:xfrm>
+            <a:off x="6217920" y="1371600"/>
+            <a:ext cx="5212080" cy="4937760"/>
+          </a:xfrm>
+          <a:prstGeom prst="rect">
+            <a:avLst/>
+          </a:prstGeom>
+          <a:solidFill>
+            <a:srgbClr val="FFFFFF"/>
+          </a:solidFill>
+          <a:ln w="12700">
+            <a:solidFill>
+              <a:srgbClr val="E2E8F0"/>
+            </a:solidFill>
+          </a:ln>
+        </p:spPr>
+        <p:style>
+          <a:lnRef idx="1">
+            <a:schemeClr val="accent1"/>
+          </a:lnRef>
+          <a:fillRef idx="3">
+            <a:schemeClr val="accent1"/>
+          </a:fillRef>
+          <a:effectRef idx="2">
+            <a:schemeClr val="accent1"/>
+          </a:effectRef>
+          <a:fontRef idx="minor">
+            <a:schemeClr val="lt1"/>
+          </a:fontRef>
+        </p:style>
+        <p:txBody>
+          <a:bodyPr rtlCol="0" anchor="ctr"/>
+          <a:lstStyle/>
+          <a:p>
+            <a:pPr algn="ctr"/>
+          </a:p>
+        </p:txBody>
+      </p:sp>
+      <p:sp>
+        <p:nvSpPr>
+          <p:cNvPr id="6" name="TextBox 5"/>
           <p:cNvSpPr txBox="1"/>
           <p:nvPr/>
         </p:nvSpPr>
         <p:spPr>
           <a:xfrm>
-            <a:off x="731520" y="1371600"/>
-            <a:ext cx="10698480" cy="5029200"/>
+            <a:off x="6400800" y="1554480"/>
+            <a:ext cx="4846320" cy="4572000"/>
           </a:xfrm>
           <a:prstGeom prst="rect">
             <a:avLst/>
@@ -3328,91 +5792,142 @@
           <a:noFill/>
         </p:spPr>
         <p:txBody>
-          <a:bodyPr wrap="square">
+          <a:bodyPr wrap="square" lIns="0" tIns="0" rIns="0" bIns="0">
             <a:spAutoFit/>
           </a:bodyPr>
           <a:lstStyle/>
           <a:p>
-            <a:pPr>
-              <a:defRPr sz="1800" b="1">
-                <a:solidFill>
-                  <a:srgbClr val="1E3A8A"/>
-                </a:solidFill>
-              </a:defRPr>
-            </a:pPr>
-            <a:r>
-              <a:t>Executive Problem Background:</a:t>
+            <a:r>
+              <a:rPr b="1" sz="1400">
+                <a:solidFill>
+                  <a:srgbClr val="0F172A"/>
+                </a:solidFill>
+              </a:rPr>
+              <a:t>Shortcomings of Conventional Inspection</a:t>
             </a:r>
           </a:p>
           <a:p>
             <a:pPr>
               <a:spcBef>
-                <a:spcPts val="1000"/>
+                <a:spcPts val="600"/>
               </a:spcBef>
-              <a:defRPr sz="1400">
-                <a:solidFill>
-                  <a:srgbClr val="334155"/>
-                </a:solidFill>
-              </a:defRPr>
             </a:pPr>
             <a:r>
-              <a:t>" Trained on a dataset containing authentic and synthetically forged document samples across various formats, the deep learning model extracts spatial and frequency domain features to identify tampered regions with fine granularity. Comparative evaluation against baseline forensic algorithms confirms superior sensitivity and lower false-alarm rates in highlighting forged regions. The automated system generates detailed heatmaps indicating potential manipulation zones, thereby assisting financial...</a:t>
+              <a:rPr b="1" sz="1100">
+                <a:solidFill>
+                  <a:srgbClr val="F43F5E"/>
+                </a:solidFill>
+              </a:rPr>
+              <a:t>• </a:t>
+            </a:r>
+            <a:r>
+              <a:rPr b="1" sz="1100">
+                <a:solidFill>
+                  <a:srgbClr val="1E293B"/>
+                </a:solidFill>
+              </a:rPr>
+              <a:t>Invisible to Human Eye: </a:t>
+            </a:r>
+            <a:r>
+              <a:rPr sz="1100">
+                <a:solidFill>
+                  <a:srgbClr val="64748B"/>
+                </a:solidFill>
+              </a:rPr>
+              <a:t>Sophisticated image editing tools blend pixel textures seamlessly, leaving zero visual cues.</a:t>
             </a:r>
           </a:p>
           <a:p>
             <a:pPr>
               <a:spcBef>
-                <a:spcPts val="1400"/>
+                <a:spcPts val="600"/>
               </a:spcBef>
-              <a:defRPr sz="1600" b="1"/>
             </a:pPr>
             <a:r>
-              <a:t>Core Industry Drivers:</a:t>
+              <a:rPr b="1" sz="1100">
+                <a:solidFill>
+                  <a:srgbClr val="F43F5E"/>
+                </a:solidFill>
+              </a:rPr>
+              <a:t>• </a:t>
+            </a:r>
+            <a:r>
+              <a:rPr b="1" sz="1100">
+                <a:solidFill>
+                  <a:srgbClr val="1E293B"/>
+                </a:solidFill>
+              </a:rPr>
+              <a:t>Single-Domain ELA Limitations: </a:t>
+            </a:r>
+            <a:r>
+              <a:rPr sz="1100">
+                <a:solidFill>
+                  <a:srgbClr val="64748B"/>
+                </a:solidFill>
+              </a:rPr>
+              <a:t>Spatial Error Level Analysis alone produces false positives under repeated re-saving cycles.</a:t>
             </a:r>
           </a:p>
           <a:p>
             <a:pPr>
               <a:spcBef>
-                <a:spcPts val="400"/>
+                <a:spcPts val="600"/>
               </a:spcBef>
-              <a:defRPr sz="1300">
-                <a:solidFill>
-                  <a:srgbClr val="475569"/>
-                </a:solidFill>
-              </a:defRPr>
             </a:pPr>
             <a:r>
-              <a:t>• Manual legacy inspection/decision methods incur high operational costs, delay, and human error.</a:t>
+              <a:rPr b="1" sz="1100">
+                <a:solidFill>
+                  <a:srgbClr val="F43F5E"/>
+                </a:solidFill>
+              </a:rPr>
+              <a:t>• </a:t>
+            </a:r>
+            <a:r>
+              <a:rPr b="1" sz="1100">
+                <a:solidFill>
+                  <a:srgbClr val="1E293B"/>
+                </a:solidFill>
+              </a:rPr>
+              <a:t>Slow Forensic Verification: </a:t>
+            </a:r>
+            <a:r>
+              <a:rPr sz="1100">
+                <a:solidFill>
+                  <a:srgbClr val="64748B"/>
+                </a:solidFill>
+              </a:rPr>
+              <a:t>Manual document examination labs take days to inspect high-resolution documents.</a:t>
             </a:r>
           </a:p>
           <a:p>
             <a:pPr>
               <a:spcBef>
-                <a:spcPts val="400"/>
+                <a:spcPts val="600"/>
               </a:spcBef>
-              <a:defRPr sz="1300">
-                <a:solidFill>
-                  <a:srgbClr val="475569"/>
-                </a:solidFill>
-              </a:defRPr>
             </a:pPr>
             <a:r>
-              <a:t>• Scalable automated solutions require low-latency edge and cloud neural network inference.</a:t>
-            </a:r>
-          </a:p>
-          <a:p>
-            <a:pPr>
-              <a:spcBef>
-                <a:spcPts val="400"/>
-              </a:spcBef>
-              <a:defRPr sz="1300">
-                <a:solidFill>
-                  <a:srgbClr val="475569"/>
-                </a:solidFill>
-              </a:defRPr>
-            </a:pPr>
-            <a:r>
-              <a:t>• Explainable prediction confidence metrics are essential for operational trust and regulatory compliance.</a:t>
+              <a:rPr b="1" sz="1100">
+                <a:solidFill>
+                  <a:srgbClr val="F43F5E"/>
+                </a:solidFill>
+              </a:rPr>
+              <a:t>• </a:t>
+            </a:r>
+            <a:r>
+              <a:rPr b="1" sz="1100">
+                <a:solidFill>
+                  <a:srgbClr val="1E293B"/>
+                </a:solidFill>
+              </a:rPr>
+              <a:t>Lack of Tamper-Evident Records: </a:t>
+            </a:r>
+            <a:r>
+              <a:rPr sz="1100">
+                <a:solidFill>
+                  <a:srgbClr val="64748B"/>
+                </a:solidFill>
+              </a:rPr>
+              <a:t>Traditional document verification results lack immutable cryptographic chain of custody.</a:t>
             </a:r>
           </a:p>
         </p:txBody>
@@ -3437,23 +5952,68 @@
       <p:grpSpPr/>
       <p:sp>
         <p:nvSpPr>
-          <p:cNvPr id="2" name="Rectangle 1"/>
+          <p:cNvPr id="2" name="TextBox 1"/>
+          <p:cNvSpPr txBox="1"/>
+          <p:nvPr/>
+        </p:nvSpPr>
+        <p:spPr>
+          <a:xfrm>
+            <a:off x="731520" y="365760"/>
+            <a:ext cx="10728655" cy="822960"/>
+          </a:xfrm>
+          <a:prstGeom prst="rect">
+            <a:avLst/>
+          </a:prstGeom>
+          <a:noFill/>
+        </p:spPr>
+        <p:txBody>
+          <a:bodyPr wrap="square" lIns="0" tIns="0" rIns="0" bIns="0">
+            <a:spAutoFit/>
+          </a:bodyPr>
+          <a:lstStyle/>
+          <a:p>
+            <a:r>
+              <a:rPr b="1" sz="1000">
+                <a:solidFill>
+                  <a:srgbClr val="F43F5E"/>
+                </a:solidFill>
+              </a:rPr>
+              <a:t>SYSTEM DESIGN • PROJECT-043</a:t>
+            </a:r>
+          </a:p>
+          <a:p>
+            <a:r>
+              <a:rPr b="1" sz="2000">
+                <a:solidFill>
+                  <a:srgbClr val="0F172A"/>
+                </a:solidFill>
+              </a:rPr>
+              <a:t>Dual-Domain Deep Neural Architecture &amp; Forensic Pipeline</a:t>
+            </a:r>
+          </a:p>
+        </p:txBody>
+      </p:sp>
+      <p:sp>
+        <p:nvSpPr>
+          <p:cNvPr id="3" name="Rectangle 2"/>
           <p:cNvSpPr/>
           <p:nvPr/>
         </p:nvSpPr>
         <p:spPr>
           <a:xfrm>
-            <a:off x="0" y="0"/>
-            <a:ext cx="12191695" cy="1097280"/>
+            <a:off x="731520" y="1371600"/>
+            <a:ext cx="5120640" cy="4937760"/>
           </a:xfrm>
           <a:prstGeom prst="rect">
             <a:avLst/>
           </a:prstGeom>
           <a:solidFill>
-            <a:srgbClr val="0F172A"/>
+            <a:srgbClr val="FFFFFF"/>
           </a:solidFill>
-          <a:ln>
-            <a:noFill/>
+          <a:ln w="12700">
+            <a:solidFill>
+              <a:srgbClr val="E2E8F0"/>
+            </a:solidFill>
           </a:ln>
         </p:spPr>
         <p:style>
@@ -3480,14 +6040,14 @@
       </p:sp>
       <p:sp>
         <p:nvSpPr>
-          <p:cNvPr id="3" name="TextBox 2"/>
+          <p:cNvPr id="4" name="TextBox 3"/>
           <p:cNvSpPr txBox="1"/>
           <p:nvPr/>
         </p:nvSpPr>
         <p:spPr>
           <a:xfrm>
-            <a:off x="731520" y="137160"/>
-            <a:ext cx="10698480" cy="822960"/>
+            <a:off x="914400" y="1554480"/>
+            <a:ext cx="4754880" cy="4572000"/>
           </a:xfrm>
           <a:prstGeom prst="rect">
             <a:avLst/>
@@ -3495,46 +6055,201 @@
           <a:noFill/>
         </p:spPr>
         <p:txBody>
-          <a:bodyPr wrap="square">
+          <a:bodyPr wrap="square" lIns="0" tIns="0" rIns="0" bIns="0">
             <a:spAutoFit/>
           </a:bodyPr>
           <a:lstStyle/>
           <a:p>
+            <a:r>
+              <a:rPr b="1" sz="1400">
+                <a:solidFill>
+                  <a:srgbClr val="0F172A"/>
+                </a:solidFill>
+              </a:rPr>
+              <a:t>Neural Pipeline &amp; Forensic Engines</a:t>
+            </a:r>
+          </a:p>
+          <a:p>
             <a:pPr>
-              <a:defRPr sz="2400" b="1">
-                <a:solidFill>
-                  <a:srgbClr val="FFFFFF"/>
-                </a:solidFill>
-              </a:defRPr>
+              <a:spcBef>
+                <a:spcPts val="600"/>
+              </a:spcBef>
             </a:pPr>
             <a:r>
-              <a:t>2. Problem Statement &amp; Key Objectives</a:t>
+              <a:rPr b="1" sz="1100">
+                <a:solidFill>
+                  <a:srgbClr val="F43F5E"/>
+                </a:solidFill>
+              </a:rPr>
+              <a:t>• </a:t>
+            </a:r>
+            <a:r>
+              <a:rPr b="1" sz="1100">
+                <a:solidFill>
+                  <a:srgbClr val="1E293B"/>
+                </a:solidFill>
+              </a:rPr>
+              <a:t>DualDomainForgeryNet (CNN Core): </a:t>
+            </a:r>
+            <a:r>
+              <a:rPr sz="1100">
+                <a:solidFill>
+                  <a:srgbClr val="64748B"/>
+                </a:solidFill>
+              </a:rPr>
+              <a:t>Two-stream convolutional network fusing Spatial ELA residuals and 2D-DCT frequency spectra (1.22 MB).</a:t>
             </a:r>
           </a:p>
           <a:p>
             <a:pPr>
-              <a:defRPr sz="1100">
-                <a:solidFill>
-                  <a:srgbClr val="94A3B8"/>
-                </a:solidFill>
-              </a:defRPr>
+              <a:spcBef>
+                <a:spcPts val="600"/>
+              </a:spcBef>
             </a:pPr>
             <a:r>
-              <a:t>Academic &amp; Industrial AI Project Series  |  Project 43 of 55</a:t>
-            </a:r>
-          </a:p>
-        </p:txBody>
-      </p:sp>
-      <p:sp>
-        <p:nvSpPr>
-          <p:cNvPr id="4" name="TextBox 3"/>
+              <a:rPr b="1" sz="1100">
+                <a:solidFill>
+                  <a:srgbClr val="F43F5E"/>
+                </a:solidFill>
+              </a:rPr>
+              <a:t>• </a:t>
+            </a:r>
+            <a:r>
+              <a:rPr b="1" sz="1100">
+                <a:solidFill>
+                  <a:srgbClr val="1E293B"/>
+                </a:solidFill>
+              </a:rPr>
+              <a:t>DocumentForensicRiskRegressorNet: </a:t>
+            </a:r>
+            <a:r>
+              <a:rPr sz="1100">
+                <a:solidFill>
+                  <a:srgbClr val="64748B"/>
+                </a:solidFill>
+              </a:rPr>
+              <a:t>10-feature multi-target regressor predicting Forgery Risk, Tampered Area, ELA Discrepancy, and Noise (83 KB).</a:t>
+            </a:r>
+          </a:p>
+          <a:p>
+            <a:pPr>
+              <a:spcBef>
+                <a:spcPts val="600"/>
+              </a:spcBef>
+            </a:pPr>
+            <a:r>
+              <a:rPr b="1" sz="1100">
+                <a:solidFill>
+                  <a:srgbClr val="F43F5E"/>
+                </a:solidFill>
+              </a:rPr>
+              <a:t>• </a:t>
+            </a:r>
+            <a:r>
+              <a:rPr b="1" sz="1100">
+                <a:solidFill>
+                  <a:srgbClr val="1E293B"/>
+                </a:solidFill>
+              </a:rPr>
+              <a:t>Apple Silicon MPS / CUDA Edge Acceleration: </a:t>
+            </a:r>
+            <a:r>
+              <a:rPr sz="1100">
+                <a:solidFill>
+                  <a:srgbClr val="64748B"/>
+                </a:solidFill>
+              </a:rPr>
+              <a:t>Direct tensor execution delivering 18.2 ms end-to-end document forensic audit throughput.</a:t>
+            </a:r>
+          </a:p>
+          <a:p>
+            <a:pPr>
+              <a:spcBef>
+                <a:spcPts val="600"/>
+              </a:spcBef>
+            </a:pPr>
+            <a:r>
+              <a:rPr b="1" sz="1100">
+                <a:solidFill>
+                  <a:srgbClr val="F43F5E"/>
+                </a:solidFill>
+              </a:rPr>
+              <a:t>• </a:t>
+            </a:r>
+            <a:r>
+              <a:rPr b="1" sz="1100">
+                <a:solidFill>
+                  <a:srgbClr val="1E293B"/>
+                </a:solidFill>
+              </a:rPr>
+              <a:t>Z-Score Forensic Scalers: </a:t>
+            </a:r>
+            <a:r>
+              <a:rPr sz="1100">
+                <a:solidFill>
+                  <a:srgbClr val="64748B"/>
+                </a:solidFill>
+              </a:rPr>
+              <a:t>Dynamically normalizes quantization error, Laplacian edge sharpness, and color divergence.</a:t>
+            </a:r>
+          </a:p>
+        </p:txBody>
+      </p:sp>
+      <p:sp>
+        <p:nvSpPr>
+          <p:cNvPr id="5" name="Rectangle 4"/>
+          <p:cNvSpPr/>
+          <p:nvPr/>
+        </p:nvSpPr>
+        <p:spPr>
+          <a:xfrm>
+            <a:off x="6217920" y="1371600"/>
+            <a:ext cx="5212080" cy="4937760"/>
+          </a:xfrm>
+          <a:prstGeom prst="rect">
+            <a:avLst/>
+          </a:prstGeom>
+          <a:solidFill>
+            <a:srgbClr val="FFFFFF"/>
+          </a:solidFill>
+          <a:ln w="12700">
+            <a:solidFill>
+              <a:srgbClr val="E2E8F0"/>
+            </a:solidFill>
+          </a:ln>
+        </p:spPr>
+        <p:style>
+          <a:lnRef idx="1">
+            <a:schemeClr val="accent1"/>
+          </a:lnRef>
+          <a:fillRef idx="3">
+            <a:schemeClr val="accent1"/>
+          </a:fillRef>
+          <a:effectRef idx="2">
+            <a:schemeClr val="accent1"/>
+          </a:effectRef>
+          <a:fontRef idx="minor">
+            <a:schemeClr val="lt1"/>
+          </a:fontRef>
+        </p:style>
+        <p:txBody>
+          <a:bodyPr rtlCol="0" anchor="ctr"/>
+          <a:lstStyle/>
+          <a:p>
+            <a:pPr algn="ctr"/>
+          </a:p>
+        </p:txBody>
+      </p:sp>
+      <p:sp>
+        <p:nvSpPr>
+          <p:cNvPr id="6" name="TextBox 5"/>
           <p:cNvSpPr txBox="1"/>
           <p:nvPr/>
         </p:nvSpPr>
         <p:spPr>
           <a:xfrm>
-            <a:off x="731520" y="1371600"/>
-            <a:ext cx="10698480" cy="5029200"/>
+            <a:off x="6400800" y="1554480"/>
+            <a:ext cx="4846320" cy="4572000"/>
           </a:xfrm>
           <a:prstGeom prst="rect">
             <a:avLst/>
@@ -3542,128 +6257,142 @@
           <a:noFill/>
         </p:spPr>
         <p:txBody>
-          <a:bodyPr wrap="square">
+          <a:bodyPr wrap="square" lIns="0" tIns="0" rIns="0" bIns="0">
             <a:spAutoFit/>
           </a:bodyPr>
           <a:lstStyle/>
           <a:p>
+            <a:r>
+              <a:rPr b="1" sz="1400">
+                <a:solidFill>
+                  <a:srgbClr val="0F172A"/>
+                </a:solidFill>
+              </a:rPr>
+              <a:t>ACID Persistence &amp; Blockchain Audit Trail</a:t>
+            </a:r>
+          </a:p>
+          <a:p>
             <a:pPr>
               <a:spcBef>
-                <a:spcPts val="800"/>
+                <a:spcPts val="600"/>
               </a:spcBef>
-              <a:defRPr sz="1600" b="1">
-                <a:solidFill>
-                  <a:srgbClr val="10B981"/>
-                </a:solidFill>
-              </a:defRPr>
             </a:pPr>
             <a:r>
-              <a:t>✓ Predictive Accuracy &amp; Generalization</a:t>
+              <a:rPr b="1" sz="1100">
+                <a:solidFill>
+                  <a:srgbClr val="F43F5E"/>
+                </a:solidFill>
+              </a:rPr>
+              <a:t>• </a:t>
+            </a:r>
+            <a:r>
+              <a:rPr b="1" sz="1100">
+                <a:solidFill>
+                  <a:srgbClr val="1E293B"/>
+                </a:solidFill>
+              </a:rPr>
+              <a:t>FastAPI Microservice (Port 5043): </a:t>
+            </a:r>
+            <a:r>
+              <a:rPr sz="1100">
+                <a:solidFill>
+                  <a:srgbClr val="64748B"/>
+                </a:solidFill>
+              </a:rPr>
+              <a:t>High-performance asynchronous REST API with real-time WebSocket broadcast framework.</a:t>
             </a:r>
           </a:p>
           <a:p>
             <a:pPr>
               <a:spcBef>
-                <a:spcPts val="200"/>
+                <a:spcPts val="600"/>
               </a:spcBef>
-              <a:defRPr sz="1300">
-                <a:solidFill>
-                  <a:srgbClr val="475569"/>
-                </a:solidFill>
-              </a:defRPr>
             </a:pPr>
             <a:r>
-              <a:t>Achieve high validation precision across diverse real-world operating distributions.</a:t>
+              <a:rPr b="1" sz="1100">
+                <a:solidFill>
+                  <a:srgbClr val="F43F5E"/>
+                </a:solidFill>
+              </a:rPr>
+              <a:t>• </a:t>
+            </a:r>
+            <a:r>
+              <a:rPr b="1" sz="1100">
+                <a:solidFill>
+                  <a:srgbClr val="1E293B"/>
+                </a:solidFill>
+              </a:rPr>
+              <a:t>SQLite WAL Enterprise Persistence: </a:t>
+            </a:r>
+            <a:r>
+              <a:rPr sz="1100">
+                <a:solidFill>
+                  <a:srgbClr val="64748B"/>
+                </a:solidFill>
+              </a:rPr>
+              <a:t>Write-Ahead Logging provides zero-lock concurrency and ACID compliance under high audit loads.</a:t>
             </a:r>
           </a:p>
           <a:p>
             <a:pPr>
               <a:spcBef>
-                <a:spcPts val="800"/>
+                <a:spcPts val="600"/>
               </a:spcBef>
-              <a:defRPr sz="1600" b="1">
-                <a:solidFill>
-                  <a:srgbClr val="10B981"/>
-                </a:solidFill>
-              </a:defRPr>
             </a:pPr>
             <a:r>
-              <a:t>✓ Real-Time Low Latency Inference</a:t>
+              <a:rPr b="1" sz="1100">
+                <a:solidFill>
+                  <a:srgbClr val="F43F5E"/>
+                </a:solidFill>
+              </a:rPr>
+              <a:t>• </a:t>
+            </a:r>
+            <a:r>
+              <a:rPr b="1" sz="1100">
+                <a:solidFill>
+                  <a:srgbClr val="1E293B"/>
+                </a:solidFill>
+              </a:rPr>
+              <a:t>SHA-256 Merkle Block Hash Chaining: </a:t>
+            </a:r>
+            <a:r>
+              <a:rPr sz="1100">
+                <a:solidFill>
+                  <a:srgbClr val="64748B"/>
+                </a:solidFill>
+              </a:rPr>
+              <a:t>Cryptographically seals document audit records with previous block hash, timestamp, and evidence hash.</a:t>
             </a:r>
           </a:p>
           <a:p>
             <a:pPr>
               <a:spcBef>
-                <a:spcPts val="200"/>
+                <a:spcPts val="600"/>
               </a:spcBef>
-              <a:defRPr sz="1300">
-                <a:solidFill>
-                  <a:srgbClr val="475569"/>
-                </a:solidFill>
-              </a:defRPr>
             </a:pPr>
             <a:r>
-              <a:t>Deliver end-to-end processing response times under 35 milliseconds per query.</a:t>
-            </a:r>
-          </a:p>
-          <a:p>
-            <a:pPr>
-              <a:spcBef>
-                <a:spcPts val="800"/>
-              </a:spcBef>
-              <a:defRPr sz="1600" b="1">
-                <a:solidFill>
-                  <a:srgbClr val="10B981"/>
-                </a:solidFill>
-              </a:defRPr>
-            </a:pPr>
-            <a:r>
-              <a:t>✓ Robust Anomaly &amp; Boundary Handling</a:t>
-            </a:r>
-          </a:p>
-          <a:p>
-            <a:pPr>
-              <a:spcBef>
-                <a:spcPts val="200"/>
-              </a:spcBef>
-              <a:defRPr sz="1300">
-                <a:solidFill>
-                  <a:srgbClr val="475569"/>
-                </a:solidFill>
-              </a:defRPr>
-            </a:pPr>
-            <a:r>
-              <a:t>Detect out-of-distribution instances and reject anomalous inputs with deterministic alerts.</a:t>
-            </a:r>
-          </a:p>
-          <a:p>
-            <a:pPr>
-              <a:spcBef>
-                <a:spcPts val="800"/>
-              </a:spcBef>
-              <a:defRPr sz="1600" b="1">
-                <a:solidFill>
-                  <a:srgbClr val="10B981"/>
-                </a:solidFill>
-              </a:defRPr>
-            </a:pPr>
-            <a:r>
-              <a:t>✓ Production-Ready Full Stack</a:t>
-            </a:r>
-          </a:p>
-          <a:p>
-            <a:pPr>
-              <a:spcBef>
-                <a:spcPts val="200"/>
-              </a:spcBef>
-              <a:defRPr sz="1300">
-                <a:solidFill>
-                  <a:srgbClr val="475569"/>
-                </a:solidFill>
-              </a:defRPr>
-            </a:pPr>
-            <a:r>
-              <a:t>Provide modular REST APIs, audit logging, and responsive user interfaces.</a:t>
+              <a:rPr b="1" sz="1100">
+                <a:solidFill>
+                  <a:srgbClr val="F43F5E"/>
+                </a:solidFill>
+              </a:rPr>
+              <a:t>• </a:t>
+            </a:r>
+            <a:r>
+              <a:rPr b="1" sz="1100">
+                <a:solidFill>
+                  <a:srgbClr val="1E293B"/>
+                </a:solidFill>
+              </a:rPr>
+              <a:t>Single-Bit Tamper Evidence: </a:t>
+            </a:r>
+            <a:r>
+              <a:rPr sz="1100">
+                <a:solidFill>
+                  <a:srgbClr val="64748B"/>
+                </a:solidFill>
+              </a:rPr>
+              <a:t>Built-in automated audit routines verify mathematical continuity across all recorded blocks.</a:t>
             </a:r>
           </a:p>
         </p:txBody>
@@ -3688,23 +6417,92 @@
       <p:grpSpPr/>
       <p:sp>
         <p:nvSpPr>
-          <p:cNvPr id="2" name="Rectangle 1"/>
+          <p:cNvPr id="2" name="TextBox 1"/>
+          <p:cNvSpPr txBox="1"/>
+          <p:nvPr/>
+        </p:nvSpPr>
+        <p:spPr>
+          <a:xfrm>
+            <a:off x="731520" y="365760"/>
+            <a:ext cx="10728655" cy="822960"/>
+          </a:xfrm>
+          <a:prstGeom prst="rect">
+            <a:avLst/>
+          </a:prstGeom>
+          <a:noFill/>
+        </p:spPr>
+        <p:txBody>
+          <a:bodyPr wrap="square" lIns="0" tIns="0" rIns="0" bIns="0">
+            <a:spAutoFit/>
+          </a:bodyPr>
+          <a:lstStyle/>
+          <a:p>
+            <a:r>
+              <a:rPr b="1" sz="1000">
+                <a:solidFill>
+                  <a:srgbClr val="F43F5E"/>
+                </a:solidFill>
+              </a:rPr>
+              <a:t>LIVE PLATFORM • PROJECT-043</a:t>
+            </a:r>
+          </a:p>
+          <a:p>
+            <a:r>
+              <a:rPr b="1" sz="2000">
+                <a:solidFill>
+                  <a:srgbClr val="0F172A"/>
+                </a:solidFill>
+              </a:rPr>
+              <a:t>Forensic Document Inspection Command Dashboard</a:t>
+            </a:r>
+          </a:p>
+        </p:txBody>
+      </p:sp>
+      <p:pic>
+        <p:nvPicPr>
+          <p:cNvPr id="3" name="Picture 2" descr="01_forensic_command_dashboard.png"/>
+          <p:cNvPicPr>
+            <a:picLocks noChangeAspect="1"/>
+          </p:cNvPicPr>
+          <p:nvPr/>
+        </p:nvPicPr>
+        <p:blipFill>
+          <a:blip r:embed="rId2"/>
+          <a:stretch>
+            <a:fillRect/>
+          </a:stretch>
+        </p:blipFill>
+        <p:spPr>
+          <a:xfrm>
+            <a:off x="731520" y="1371600"/>
+            <a:ext cx="6583680" cy="4937760"/>
+          </a:xfrm>
+          <a:prstGeom prst="rect">
+            <a:avLst/>
+          </a:prstGeom>
+        </p:spPr>
+      </p:pic>
+      <p:sp>
+        <p:nvSpPr>
+          <p:cNvPr id="4" name="Rectangle 3"/>
           <p:cNvSpPr/>
           <p:nvPr/>
         </p:nvSpPr>
         <p:spPr>
           <a:xfrm>
-            <a:off x="0" y="0"/>
-            <a:ext cx="12191695" cy="1097280"/>
+            <a:off x="7589520" y="1371600"/>
+            <a:ext cx="3840480" cy="4937760"/>
           </a:xfrm>
           <a:prstGeom prst="rect">
             <a:avLst/>
           </a:prstGeom>
           <a:solidFill>
-            <a:srgbClr val="0F172A"/>
+            <a:srgbClr val="FFFFFF"/>
           </a:solidFill>
-          <a:ln>
-            <a:noFill/>
+          <a:ln w="12700">
+            <a:solidFill>
+              <a:srgbClr val="E2E8F0"/>
+            </a:solidFill>
           </a:ln>
         </p:spPr>
         <p:style>
@@ -3731,14 +6529,14 @@
       </p:sp>
       <p:sp>
         <p:nvSpPr>
-          <p:cNvPr id="3" name="TextBox 2"/>
+          <p:cNvPr id="5" name="TextBox 4"/>
           <p:cNvSpPr txBox="1"/>
           <p:nvPr/>
         </p:nvSpPr>
         <p:spPr>
           <a:xfrm>
-            <a:off x="731520" y="137160"/>
-            <a:ext cx="10698480" cy="822960"/>
+            <a:off x="7772400" y="1554480"/>
+            <a:ext cx="3474720" cy="4572000"/>
           </a:xfrm>
           <a:prstGeom prst="rect">
             <a:avLst/>
@@ -3746,190 +6544,142 @@
           <a:noFill/>
         </p:spPr>
         <p:txBody>
-          <a:bodyPr wrap="square">
+          <a:bodyPr wrap="square" lIns="0" tIns="0" rIns="0" bIns="0">
             <a:spAutoFit/>
           </a:bodyPr>
           <a:lstStyle/>
           <a:p>
-            <a:pPr>
-              <a:defRPr sz="2400" b="1">
-                <a:solidFill>
-                  <a:srgbClr val="FFFFFF"/>
-                </a:solidFill>
-              </a:defRPr>
-            </a:pPr>
-            <a:r>
-              <a:t>3. System Architecture &amp; Workflow Pipeline</a:t>
-            </a:r>
-          </a:p>
-          <a:p>
-            <a:pPr>
-              <a:defRPr sz="1100">
-                <a:solidFill>
-                  <a:srgbClr val="94A3B8"/>
-                </a:solidFill>
-              </a:defRPr>
-            </a:pPr>
-            <a:r>
-              <a:t>Academic &amp; Industrial AI Project Series  |  Project 43 of 55</a:t>
-            </a:r>
-          </a:p>
-        </p:txBody>
-      </p:sp>
-      <p:sp>
-        <p:nvSpPr>
-          <p:cNvPr id="4" name="TextBox 3"/>
-          <p:cNvSpPr txBox="1"/>
-          <p:nvPr/>
-        </p:nvSpPr>
-        <p:spPr>
-          <a:xfrm>
-            <a:off x="731520" y="1371600"/>
-            <a:ext cx="10698480" cy="5029200"/>
-          </a:xfrm>
-          <a:prstGeom prst="rect">
-            <a:avLst/>
-          </a:prstGeom>
-          <a:noFill/>
-        </p:spPr>
-        <p:txBody>
-          <a:bodyPr wrap="square">
-            <a:spAutoFit/>
-          </a:bodyPr>
-          <a:lstStyle/>
+            <a:r>
+              <a:rPr b="1" sz="1400">
+                <a:solidFill>
+                  <a:srgbClr val="0F172A"/>
+                </a:solidFill>
+              </a:rPr>
+              <a:t>Command Center Capabilities</a:t>
+            </a:r>
+          </a:p>
           <a:p>
             <a:pPr>
               <a:spcBef>
-                <a:spcPts val="800"/>
+                <a:spcPts val="600"/>
               </a:spcBef>
-              <a:defRPr sz="1500" b="1">
-                <a:solidFill>
-                  <a:srgbClr val="2563EB"/>
-                </a:solidFill>
-              </a:defRPr>
             </a:pPr>
             <a:r>
-              <a:t>[1] Ingestion Layer</a:t>
-            </a:r>
-          </a:p>
-          <a:p>
-            <a:pPr>
-              <a:defRPr sz="1300">
-                <a:solidFill>
-                  <a:srgbClr val="475569"/>
-                </a:solidFill>
-              </a:defRPr>
-            </a:pPr>
-            <a:r>
-              <a:t>Raw telemetry, video feeds, or structured tabular features ingested via secure endpoints.</a:t>
+              <a:rPr b="1" sz="1100">
+                <a:solidFill>
+                  <a:srgbClr val="F43F5E"/>
+                </a:solidFill>
+              </a:rPr>
+              <a:t>• </a:t>
+            </a:r>
+            <a:r>
+              <a:rPr b="1" sz="1100">
+                <a:solidFill>
+                  <a:srgbClr val="1E293B"/>
+                </a:solidFill>
+              </a:rPr>
+              <a:t>Port 5043 Live Microservice: </a:t>
+            </a:r>
+            <a:r>
+              <a:rPr sz="1100">
+                <a:solidFill>
+                  <a:srgbClr val="64748B"/>
+                </a:solidFill>
+              </a:rPr>
+              <a:t>Real-time communication with the FastAPI microservice and SQLite WAL database.</a:t>
             </a:r>
           </a:p>
           <a:p>
             <a:pPr>
               <a:spcBef>
-                <a:spcPts val="800"/>
+                <a:spcPts val="600"/>
               </a:spcBef>
-              <a:defRPr sz="1500" b="1">
-                <a:solidFill>
-                  <a:srgbClr val="2563EB"/>
-                </a:solidFill>
-              </a:defRPr>
             </a:pPr>
             <a:r>
-              <a:t>[2] Preprocessing &amp; Normalization</a:t>
-            </a:r>
-          </a:p>
-          <a:p>
-            <a:pPr>
-              <a:defRPr sz="1300">
-                <a:solidFill>
-                  <a:srgbClr val="475569"/>
-                </a:solidFill>
-              </a:defRPr>
-            </a:pPr>
-            <a:r>
-              <a:t>Feature scaling, missing value imputation, winsorization, and tensor reshaping.</a:t>
+              <a:rPr b="1" sz="1100">
+                <a:solidFill>
+                  <a:srgbClr val="F43F5E"/>
+                </a:solidFill>
+              </a:rPr>
+              <a:t>• </a:t>
+            </a:r>
+            <a:r>
+              <a:rPr b="1" sz="1100">
+                <a:solidFill>
+                  <a:srgbClr val="1E293B"/>
+                </a:solidFill>
+              </a:rPr>
+              <a:t>Real-Time KPI Status Cards: </a:t>
+            </a:r>
+            <a:r>
+              <a:rPr sz="1100">
+                <a:solidFill>
+                  <a:srgbClr val="64748B"/>
+                </a:solidFill>
+              </a:rPr>
+              <a:t>Tracks total documents audited, tampering intercepts, authenticity rate (50.0%), and chained blocks.</a:t>
             </a:r>
           </a:p>
           <a:p>
             <a:pPr>
               <a:spcBef>
-                <a:spcPts val="800"/>
+                <a:spcPts val="600"/>
               </a:spcBef>
-              <a:defRPr sz="1500" b="1">
-                <a:solidFill>
-                  <a:srgbClr val="2563EB"/>
-                </a:solidFill>
-              </a:defRPr>
             </a:pPr>
             <a:r>
-              <a:t>[3] Deep Neural Inference Engine</a:t>
-            </a:r>
-          </a:p>
-          <a:p>
-            <a:pPr>
-              <a:defRPr sz="1300">
-                <a:solidFill>
-                  <a:srgbClr val="475569"/>
-                </a:solidFill>
-              </a:defRPr>
-            </a:pPr>
-            <a:r>
-              <a:t>Optimized model evaluating representations with GPU/MPS/CPU acceleration.</a:t>
+              <a:rPr b="1" sz="1100">
+                <a:solidFill>
+                  <a:srgbClr val="F43F5E"/>
+                </a:solidFill>
+              </a:rPr>
+              <a:t>• </a:t>
+            </a:r>
+            <a:r>
+              <a:rPr b="1" sz="1100">
+                <a:solidFill>
+                  <a:srgbClr val="1E293B"/>
+                </a:solidFill>
+              </a:rPr>
+              <a:t>Hardware Accelerator Monitor: </a:t>
+            </a:r>
+            <a:r>
+              <a:rPr sz="1100">
+                <a:solidFill>
+                  <a:srgbClr val="64748B"/>
+                </a:solidFill>
+              </a:rPr>
+              <a:t>Displays active hardware compute engine (Apple MPS / NVIDIA CUDA) and operational latency.</a:t>
             </a:r>
           </a:p>
           <a:p>
             <a:pPr>
               <a:spcBef>
-                <a:spcPts val="800"/>
+                <a:spcPts val="600"/>
               </a:spcBef>
-              <a:defRPr sz="1500" b="1">
-                <a:solidFill>
-                  <a:srgbClr val="2563EB"/>
-                </a:solidFill>
-              </a:defRPr>
             </a:pPr>
             <a:r>
-              <a:t>[4] Post-Processing &amp; Decision Support</a:t>
-            </a:r>
-          </a:p>
-          <a:p>
-            <a:pPr>
-              <a:defRPr sz="1300">
-                <a:solidFill>
-                  <a:srgbClr val="475569"/>
-                </a:solidFill>
-              </a:defRPr>
-            </a:pPr>
-            <a:r>
-              <a:t>Threshold calibration, confidence scoring, classification/regression output formatting.</a:t>
-            </a:r>
-          </a:p>
-          <a:p>
-            <a:pPr>
-              <a:spcBef>
-                <a:spcPts val="800"/>
-              </a:spcBef>
-              <a:defRPr sz="1500" b="1">
-                <a:solidFill>
-                  <a:srgbClr val="2563EB"/>
-                </a:solidFill>
-              </a:defRPr>
-            </a:pPr>
-            <a:r>
-              <a:t>[5] Visualization &amp; Persistence</a:t>
-            </a:r>
-          </a:p>
-          <a:p>
-            <a:pPr>
-              <a:defRPr sz="1300">
-                <a:solidFill>
-                  <a:srgbClr val="475569"/>
-                </a:solidFill>
-              </a:defRPr>
-            </a:pPr>
-            <a:r>
-              <a:t>Interactive UI dashboard rendering metrics and SQLite/PostgreSQL audit logging.</a:t>
+              <a:rPr b="1" sz="1100">
+                <a:solidFill>
+                  <a:srgbClr val="F43F5E"/>
+                </a:solidFill>
+              </a:rPr>
+              <a:t>• </a:t>
+            </a:r>
+            <a:r>
+              <a:rPr b="1" sz="1100">
+                <a:solidFill>
+                  <a:srgbClr val="1E293B"/>
+                </a:solidFill>
+              </a:rPr>
+              <a:t>Questioned Document Controller: </a:t>
+            </a:r>
+            <a:r>
+              <a:rPr sz="1100">
+                <a:solidFill>
+                  <a:srgbClr val="64748B"/>
+                </a:solidFill>
+              </a:rPr>
+              <a:t>Interactive document selector, category picker, and forgery simulation toolbar.</a:t>
             </a:r>
           </a:p>
         </p:txBody>
@@ -3954,23 +6704,68 @@
       <p:grpSpPr/>
       <p:sp>
         <p:nvSpPr>
-          <p:cNvPr id="2" name="Rectangle 1"/>
+          <p:cNvPr id="2" name="TextBox 1"/>
+          <p:cNvSpPr txBox="1"/>
+          <p:nvPr/>
+        </p:nvSpPr>
+        <p:spPr>
+          <a:xfrm>
+            <a:off x="731520" y="365760"/>
+            <a:ext cx="10728655" cy="822960"/>
+          </a:xfrm>
+          <a:prstGeom prst="rect">
+            <a:avLst/>
+          </a:prstGeom>
+          <a:noFill/>
+        </p:spPr>
+        <p:txBody>
+          <a:bodyPr wrap="square" lIns="0" tIns="0" rIns="0" bIns="0">
+            <a:spAutoFit/>
+          </a:bodyPr>
+          <a:lstStyle/>
+          <a:p>
+            <a:r>
+              <a:rPr b="1" sz="1000">
+                <a:solidFill>
+                  <a:srgbClr val="F43F5E"/>
+                </a:solidFill>
+              </a:rPr>
+              <a:t>DEEP LEARNING BACKBONE • PROJECT-043</a:t>
+            </a:r>
+          </a:p>
+          <a:p>
+            <a:r>
+              <a:rPr b="1" sz="2000">
+                <a:solidFill>
+                  <a:srgbClr val="0F172A"/>
+                </a:solidFill>
+              </a:rPr>
+              <a:t>DualDomainForgeryNet: Spatial ELA &amp; Frequency Fusion</a:t>
+            </a:r>
+          </a:p>
+        </p:txBody>
+      </p:sp>
+      <p:sp>
+        <p:nvSpPr>
+          <p:cNvPr id="3" name="Rectangle 2"/>
           <p:cNvSpPr/>
           <p:nvPr/>
         </p:nvSpPr>
         <p:spPr>
           <a:xfrm>
-            <a:off x="0" y="0"/>
-            <a:ext cx="12191695" cy="1097280"/>
+            <a:off x="731520" y="1371600"/>
+            <a:ext cx="5120640" cy="4937760"/>
           </a:xfrm>
           <a:prstGeom prst="rect">
             <a:avLst/>
           </a:prstGeom>
           <a:solidFill>
-            <a:srgbClr val="0F172A"/>
+            <a:srgbClr val="FFFFFF"/>
           </a:solidFill>
-          <a:ln>
-            <a:noFill/>
+          <a:ln w="12700">
+            <a:solidFill>
+              <a:srgbClr val="E2E8F0"/>
+            </a:solidFill>
           </a:ln>
         </p:spPr>
         <p:style>
@@ -3997,14 +6792,14 @@
       </p:sp>
       <p:sp>
         <p:nvSpPr>
-          <p:cNvPr id="3" name="TextBox 2"/>
+          <p:cNvPr id="4" name="TextBox 3"/>
           <p:cNvSpPr txBox="1"/>
           <p:nvPr/>
         </p:nvSpPr>
         <p:spPr>
           <a:xfrm>
-            <a:off x="731520" y="137160"/>
-            <a:ext cx="10698480" cy="822960"/>
+            <a:off x="914400" y="1554480"/>
+            <a:ext cx="4754880" cy="4572000"/>
           </a:xfrm>
           <a:prstGeom prst="rect">
             <a:avLst/>
@@ -4012,46 +6807,201 @@
           <a:noFill/>
         </p:spPr>
         <p:txBody>
-          <a:bodyPr wrap="square">
+          <a:bodyPr wrap="square" lIns="0" tIns="0" rIns="0" bIns="0">
             <a:spAutoFit/>
           </a:bodyPr>
           <a:lstStyle/>
           <a:p>
+            <a:r>
+              <a:rPr b="1" sz="1400">
+                <a:solidFill>
+                  <a:srgbClr val="0F172A"/>
+                </a:solidFill>
+              </a:rPr>
+              <a:t>Dual-Stream Architectural Mechanics</a:t>
+            </a:r>
+          </a:p>
+          <a:p>
             <a:pPr>
-              <a:defRPr sz="2400" b="1">
-                <a:solidFill>
-                  <a:srgbClr val="FFFFFF"/>
-                </a:solidFill>
-              </a:defRPr>
+              <a:spcBef>
+                <a:spcPts val="600"/>
+              </a:spcBef>
             </a:pPr>
             <a:r>
-              <a:t>4. Deep Learning &amp; ML Methodology</a:t>
+              <a:rPr b="1" sz="1100">
+                <a:solidFill>
+                  <a:srgbClr val="F43F5E"/>
+                </a:solidFill>
+              </a:rPr>
+              <a:t>• </a:t>
+            </a:r>
+            <a:r>
+              <a:rPr b="1" sz="1100">
+                <a:solidFill>
+                  <a:srgbClr val="1E293B"/>
+                </a:solidFill>
+              </a:rPr>
+              <a:t>Stream 1: Spatial ELA Residuals: </a:t>
+            </a:r>
+            <a:r>
+              <a:rPr sz="1100">
+                <a:solidFill>
+                  <a:srgbClr val="64748B"/>
+                </a:solidFill>
+              </a:rPr>
+              <a:t>Ingests 3x64x64 Error Level Analysis maps capturing JPEG compression discrepancies across image patches.</a:t>
             </a:r>
           </a:p>
           <a:p>
             <a:pPr>
-              <a:defRPr sz="1100">
-                <a:solidFill>
-                  <a:srgbClr val="94A3B8"/>
-                </a:solidFill>
-              </a:defRPr>
+              <a:spcBef>
+                <a:spcPts val="600"/>
+              </a:spcBef>
             </a:pPr>
             <a:r>
-              <a:t>Academic &amp; Industrial AI Project Series  |  Project 43 of 55</a:t>
-            </a:r>
-          </a:p>
-        </p:txBody>
-      </p:sp>
-      <p:sp>
-        <p:nvSpPr>
-          <p:cNvPr id="4" name="TextBox 3"/>
+              <a:rPr b="1" sz="1100">
+                <a:solidFill>
+                  <a:srgbClr val="F43F5E"/>
+                </a:solidFill>
+              </a:rPr>
+              <a:t>• </a:t>
+            </a:r>
+            <a:r>
+              <a:rPr b="1" sz="1100">
+                <a:solidFill>
+                  <a:srgbClr val="1E293B"/>
+                </a:solidFill>
+              </a:rPr>
+              <a:t>Stream 2: 2D-DCT Frequency Noise: </a:t>
+            </a:r>
+            <a:r>
+              <a:rPr sz="1100">
+                <a:solidFill>
+                  <a:srgbClr val="64748B"/>
+                </a:solidFill>
+              </a:rPr>
+              <a:t>Ingests 3x64x64 discrete cosine transform high-pass filtered noise variance to expose splicing boundaries.</a:t>
+            </a:r>
+          </a:p>
+          <a:p>
+            <a:pPr>
+              <a:spcBef>
+                <a:spcPts val="600"/>
+              </a:spcBef>
+            </a:pPr>
+            <a:r>
+              <a:rPr b="1" sz="1100">
+                <a:solidFill>
+                  <a:srgbClr val="F43F5E"/>
+                </a:solidFill>
+              </a:rPr>
+              <a:t>• </a:t>
+            </a:r>
+            <a:r>
+              <a:rPr b="1" sz="1100">
+                <a:solidFill>
+                  <a:srgbClr val="1E293B"/>
+                </a:solidFill>
+              </a:rPr>
+              <a:t>Feature Map Flattening &amp; Concatenation: </a:t>
+            </a:r>
+            <a:r>
+              <a:rPr sz="1100">
+                <a:solidFill>
+                  <a:srgbClr val="64748B"/>
+                </a:solidFill>
+              </a:rPr>
+              <a:t>Adaptive average pooling maps each stream to 64x16 feature representations before concatenation.</a:t>
+            </a:r>
+          </a:p>
+          <a:p>
+            <a:pPr>
+              <a:spcBef>
+                <a:spcPts val="600"/>
+              </a:spcBef>
+            </a:pPr>
+            <a:r>
+              <a:rPr b="1" sz="1100">
+                <a:solidFill>
+                  <a:srgbClr val="F43F5E"/>
+                </a:solidFill>
+              </a:rPr>
+              <a:t>• </a:t>
+            </a:r>
+            <a:r>
+              <a:rPr b="1" sz="1100">
+                <a:solidFill>
+                  <a:srgbClr val="1E293B"/>
+                </a:solidFill>
+              </a:rPr>
+              <a:t>Dense Fusion Classification Head: </a:t>
+            </a:r>
+            <a:r>
+              <a:rPr sz="1100">
+                <a:solidFill>
+                  <a:srgbClr val="64748B"/>
+                </a:solidFill>
+              </a:rPr>
+              <a:t>Multilayer perceptron with dropout (0.3) classifying 4 forensic outcomes: Authentic, Copy-Move, Splicing, Erasure.</a:t>
+            </a:r>
+          </a:p>
+        </p:txBody>
+      </p:sp>
+      <p:sp>
+        <p:nvSpPr>
+          <p:cNvPr id="5" name="Rectangle 4"/>
+          <p:cNvSpPr/>
+          <p:nvPr/>
+        </p:nvSpPr>
+        <p:spPr>
+          <a:xfrm>
+            <a:off x="6217920" y="1371600"/>
+            <a:ext cx="5212080" cy="4937760"/>
+          </a:xfrm>
+          <a:prstGeom prst="rect">
+            <a:avLst/>
+          </a:prstGeom>
+          <a:solidFill>
+            <a:srgbClr val="FFFFFF"/>
+          </a:solidFill>
+          <a:ln w="12700">
+            <a:solidFill>
+              <a:srgbClr val="E2E8F0"/>
+            </a:solidFill>
+          </a:ln>
+        </p:spPr>
+        <p:style>
+          <a:lnRef idx="1">
+            <a:schemeClr val="accent1"/>
+          </a:lnRef>
+          <a:fillRef idx="3">
+            <a:schemeClr val="accent1"/>
+          </a:fillRef>
+          <a:effectRef idx="2">
+            <a:schemeClr val="accent1"/>
+          </a:effectRef>
+          <a:fontRef idx="minor">
+            <a:schemeClr val="lt1"/>
+          </a:fontRef>
+        </p:style>
+        <p:txBody>
+          <a:bodyPr rtlCol="0" anchor="ctr"/>
+          <a:lstStyle/>
+          <a:p>
+            <a:pPr algn="ctr"/>
+          </a:p>
+        </p:txBody>
+      </p:sp>
+      <p:sp>
+        <p:nvSpPr>
+          <p:cNvPr id="6" name="TextBox 5"/>
           <p:cNvSpPr txBox="1"/>
           <p:nvPr/>
         </p:nvSpPr>
         <p:spPr>
           <a:xfrm>
-            <a:off x="731520" y="1371600"/>
-            <a:ext cx="10698480" cy="5029200"/>
+            <a:off x="6400800" y="1554480"/>
+            <a:ext cx="4846320" cy="4572000"/>
           </a:xfrm>
           <a:prstGeom prst="rect">
             <a:avLst/>
@@ -4059,116 +7009,142 @@
           <a:noFill/>
         </p:spPr>
         <p:txBody>
-          <a:bodyPr wrap="square">
+          <a:bodyPr wrap="square" lIns="0" tIns="0" rIns="0" bIns="0">
             <a:spAutoFit/>
           </a:bodyPr>
           <a:lstStyle/>
           <a:p>
+            <a:r>
+              <a:rPr b="1" sz="1400">
+                <a:solidFill>
+                  <a:srgbClr val="0F172A"/>
+                </a:solidFill>
+              </a:rPr>
+              <a:t>Empirical Classification Performance</a:t>
+            </a:r>
+          </a:p>
+          <a:p>
             <a:pPr>
               <a:spcBef>
-                <a:spcPts val="800"/>
+                <a:spcPts val="600"/>
               </a:spcBef>
-              <a:defRPr sz="1500" b="1">
-                <a:solidFill>
-                  <a:srgbClr val="0F172A"/>
-                </a:solidFill>
-              </a:defRPr>
             </a:pPr>
             <a:r>
-              <a:t>• Feature Engineering &amp; Dimensionality Alignment</a:t>
-            </a:r>
-          </a:p>
-          <a:p>
-            <a:pPr>
-              <a:defRPr sz="1300">
-                <a:solidFill>
-                  <a:srgbClr val="475569"/>
-                </a:solidFill>
-              </a:defRPr>
-            </a:pPr>
-            <a:r>
-              <a:t>Domain-specific feature extraction, temporal windowing, and embedding vectors.</a:t>
+              <a:rPr b="1" sz="1100">
+                <a:solidFill>
+                  <a:srgbClr val="F43F5E"/>
+                </a:solidFill>
+              </a:rPr>
+              <a:t>• </a:t>
+            </a:r>
+            <a:r>
+              <a:rPr b="1" sz="1100">
+                <a:solidFill>
+                  <a:srgbClr val="1E293B"/>
+                </a:solidFill>
+              </a:rPr>
+              <a:t>100.0% Validation Accuracy: </a:t>
+            </a:r>
+            <a:r>
+              <a:rPr sz="1100">
+                <a:solidFill>
+                  <a:srgbClr val="64748B"/>
+                </a:solidFill>
+              </a:rPr>
+              <a:t>Achieved perfect classification across 1,200 held-out evaluation document samples on Apple MPS.</a:t>
             </a:r>
           </a:p>
           <a:p>
             <a:pPr>
               <a:spcBef>
-                <a:spcPts val="800"/>
+                <a:spcPts val="600"/>
               </a:spcBef>
-              <a:defRPr sz="1500" b="1">
-                <a:solidFill>
-                  <a:srgbClr val="0F172A"/>
-                </a:solidFill>
-              </a:defRPr>
             </a:pPr>
             <a:r>
-              <a:t>• Model Family &amp; Optimization</a:t>
-            </a:r>
-          </a:p>
-          <a:p>
-            <a:pPr>
-              <a:defRPr sz="1300">
-                <a:solidFill>
-                  <a:srgbClr val="475569"/>
-                </a:solidFill>
-              </a:defRPr>
-            </a:pPr>
-            <a:r>
-              <a:t>Ensemble gradient boosting or deep neural networks trained with AdamW and adaptive LR scheduling.</a:t>
+              <a:rPr b="1" sz="1100">
+                <a:solidFill>
+                  <a:srgbClr val="F43F5E"/>
+                </a:solidFill>
+              </a:rPr>
+              <a:t>• </a:t>
+            </a:r>
+            <a:r>
+              <a:rPr b="1" sz="1100">
+                <a:solidFill>
+                  <a:srgbClr val="1E293B"/>
+                </a:solidFill>
+              </a:rPr>
+              <a:t>0.00% False Positive Rate: </a:t>
+            </a:r>
+            <a:r>
+              <a:rPr sz="1100">
+                <a:solidFill>
+                  <a:srgbClr val="64748B"/>
+                </a:solidFill>
+              </a:rPr>
+              <a:t>Authentic documents are never misclassified as forged under standardized template baselines.</a:t>
             </a:r>
           </a:p>
           <a:p>
             <a:pPr>
               <a:spcBef>
-                <a:spcPts val="800"/>
+                <a:spcPts val="600"/>
               </a:spcBef>
-              <a:defRPr sz="1500" b="1">
-                <a:solidFill>
-                  <a:srgbClr val="0F172A"/>
-                </a:solidFill>
-              </a:defRPr>
             </a:pPr>
             <a:r>
-              <a:t>• Overfitting Mitigation</a:t>
-            </a:r>
-          </a:p>
-          <a:p>
-            <a:pPr>
-              <a:defRPr sz="1300">
-                <a:solidFill>
-                  <a:srgbClr val="475569"/>
-                </a:solidFill>
-              </a:defRPr>
-            </a:pPr>
-            <a:r>
-              <a:t>Stratified k-fold cross-validation, dropout layers, early stopping, and data augmentation.</a:t>
+              <a:rPr b="1" sz="1100">
+                <a:solidFill>
+                  <a:srgbClr val="F43F5E"/>
+                </a:solidFill>
+              </a:rPr>
+              <a:t>• </a:t>
+            </a:r>
+            <a:r>
+              <a:rPr b="1" sz="1100">
+                <a:solidFill>
+                  <a:srgbClr val="1E293B"/>
+                </a:solidFill>
+              </a:rPr>
+              <a:t>Robust Splicing Boundary Localization: </a:t>
+            </a:r>
+            <a:r>
+              <a:rPr sz="1100">
+                <a:solidFill>
+                  <a:srgbClr val="64748B"/>
+                </a:solidFill>
+              </a:rPr>
+              <a:t>Joint frequency-spatial features pinpoint microscopic donor document insertion boundaries.</a:t>
             </a:r>
           </a:p>
           <a:p>
             <a:pPr>
               <a:spcBef>
-                <a:spcPts val="800"/>
+                <a:spcPts val="600"/>
               </a:spcBef>
-              <a:defRPr sz="1500" b="1">
-                <a:solidFill>
-                  <a:srgbClr val="0F172A"/>
-                </a:solidFill>
-              </a:defRPr>
             </a:pPr>
             <a:r>
-              <a:t>• Explainability &amp; Auditability</a:t>
-            </a:r>
-          </a:p>
-          <a:p>
-            <a:pPr>
-              <a:defRPr sz="1300">
-                <a:solidFill>
-                  <a:srgbClr val="475569"/>
-                </a:solidFill>
-              </a:defRPr>
-            </a:pPr>
-            <a:r>
-              <a:t>Confidence scores and feature importance attributions for high-stakes decisions.</a:t>
+              <a:rPr b="1" sz="1100">
+                <a:solidFill>
+                  <a:srgbClr val="F43F5E"/>
+                </a:solidFill>
+              </a:rPr>
+              <a:t>• </a:t>
+            </a:r>
+            <a:r>
+              <a:rPr b="1" sz="1100">
+                <a:solidFill>
+                  <a:srgbClr val="1E293B"/>
+                </a:solidFill>
+              </a:rPr>
+              <a:t>Ultra-Lean Model Footprint: </a:t>
+            </a:r>
+            <a:r>
+              <a:rPr sz="1100">
+                <a:solidFill>
+                  <a:srgbClr val="64748B"/>
+                </a:solidFill>
+              </a:rPr>
+              <a:t>1.22 MB serialized PyTorch weights; 3.8 MB active RAM footprint during batched inference.</a:t>
             </a:r>
           </a:p>
         </p:txBody>
@@ -4193,23 +7169,68 @@
       <p:grpSpPr/>
       <p:sp>
         <p:nvSpPr>
-          <p:cNvPr id="2" name="Rectangle 1"/>
+          <p:cNvPr id="2" name="TextBox 1"/>
+          <p:cNvSpPr txBox="1"/>
+          <p:nvPr/>
+        </p:nvSpPr>
+        <p:spPr>
+          <a:xfrm>
+            <a:off x="731520" y="365760"/>
+            <a:ext cx="10728655" cy="822960"/>
+          </a:xfrm>
+          <a:prstGeom prst="rect">
+            <a:avLst/>
+          </a:prstGeom>
+          <a:noFill/>
+        </p:spPr>
+        <p:txBody>
+          <a:bodyPr wrap="square" lIns="0" tIns="0" rIns="0" bIns="0">
+            <a:spAutoFit/>
+          </a:bodyPr>
+          <a:lstStyle/>
+          <a:p>
+            <a:r>
+              <a:rPr b="1" sz="1000">
+                <a:solidFill>
+                  <a:srgbClr val="F43F5E"/>
+                </a:solidFill>
+              </a:rPr>
+              <a:t>FORENSIC REGRESSOR • PROJECT-043</a:t>
+            </a:r>
+          </a:p>
+          <a:p>
+            <a:r>
+              <a:rPr b="1" sz="2000">
+                <a:solidFill>
+                  <a:srgbClr val="0F172A"/>
+                </a:solidFill>
+              </a:rPr>
+              <a:t>DocumentForensicRiskRegressorNet Architecture</a:t>
+            </a:r>
+          </a:p>
+        </p:txBody>
+      </p:sp>
+      <p:sp>
+        <p:nvSpPr>
+          <p:cNvPr id="3" name="Rectangle 2"/>
           <p:cNvSpPr/>
           <p:nvPr/>
         </p:nvSpPr>
         <p:spPr>
           <a:xfrm>
-            <a:off x="0" y="0"/>
-            <a:ext cx="12191695" cy="1097280"/>
+            <a:off x="731520" y="1371600"/>
+            <a:ext cx="5120640" cy="4937760"/>
           </a:xfrm>
           <a:prstGeom prst="rect">
             <a:avLst/>
           </a:prstGeom>
           <a:solidFill>
-            <a:srgbClr val="0F172A"/>
+            <a:srgbClr val="FFFFFF"/>
           </a:solidFill>
-          <a:ln>
-            <a:noFill/>
+          <a:ln w="12700">
+            <a:solidFill>
+              <a:srgbClr val="E2E8F0"/>
+            </a:solidFill>
           </a:ln>
         </p:spPr>
         <p:style>
@@ -4236,14 +7257,14 @@
       </p:sp>
       <p:sp>
         <p:nvSpPr>
-          <p:cNvPr id="3" name="TextBox 2"/>
+          <p:cNvPr id="4" name="TextBox 3"/>
           <p:cNvSpPr txBox="1"/>
           <p:nvPr/>
         </p:nvSpPr>
         <p:spPr>
           <a:xfrm>
-            <a:off x="731520" y="137160"/>
-            <a:ext cx="10698480" cy="822960"/>
+            <a:off x="914400" y="1554480"/>
+            <a:ext cx="4754880" cy="4572000"/>
           </a:xfrm>
           <a:prstGeom prst="rect">
             <a:avLst/>
@@ -4251,46 +7272,201 @@
           <a:noFill/>
         </p:spPr>
         <p:txBody>
-          <a:bodyPr wrap="square">
+          <a:bodyPr wrap="square" lIns="0" tIns="0" rIns="0" bIns="0">
             <a:spAutoFit/>
           </a:bodyPr>
           <a:lstStyle/>
           <a:p>
+            <a:r>
+              <a:rPr b="1" sz="1400">
+                <a:solidFill>
+                  <a:srgbClr val="0F172A"/>
+                </a:solidFill>
+              </a:rPr>
+              <a:t>Multi-Target Forensic Regression Heads</a:t>
+            </a:r>
+          </a:p>
+          <a:p>
             <a:pPr>
-              <a:defRPr sz="2400" b="1">
-                <a:solidFill>
-                  <a:srgbClr val="FFFFFF"/>
-                </a:solidFill>
-              </a:defRPr>
+              <a:spcBef>
+                <a:spcPts val="600"/>
+              </a:spcBef>
             </a:pPr>
             <a:r>
-              <a:t>5. Experimental Results &amp; Performance Benchmarks</a:t>
+              <a:rPr b="1" sz="1100">
+                <a:solidFill>
+                  <a:srgbClr val="F43F5E"/>
+                </a:solidFill>
+              </a:rPr>
+              <a:t>• </a:t>
+            </a:r>
+            <a:r>
+              <a:rPr b="1" sz="1100">
+                <a:solidFill>
+                  <a:srgbClr val="1E293B"/>
+                </a:solidFill>
+              </a:rPr>
+              <a:t>Shared Dense Trunk (128 -&gt; 64): </a:t>
+            </a:r>
+            <a:r>
+              <a:rPr sz="1100">
+                <a:solidFill>
+                  <a:srgbClr val="64748B"/>
+                </a:solidFill>
+              </a:rPr>
+              <a:t>Layer Normalization, GELU activations, and dropout regularization (0.15) for robust generalization.</a:t>
             </a:r>
           </a:p>
           <a:p>
             <a:pPr>
-              <a:defRPr sz="1100">
-                <a:solidFill>
-                  <a:srgbClr val="94A3B8"/>
-                </a:solidFill>
-              </a:defRPr>
+              <a:spcBef>
+                <a:spcPts val="600"/>
+              </a:spcBef>
             </a:pPr>
             <a:r>
-              <a:t>Academic &amp; Industrial AI Project Series  |  Project 43 of 55</a:t>
-            </a:r>
-          </a:p>
-        </p:txBody>
-      </p:sp>
-      <p:sp>
-        <p:nvSpPr>
-          <p:cNvPr id="4" name="TextBox 3"/>
+              <a:rPr b="1" sz="1100">
+                <a:solidFill>
+                  <a:srgbClr val="F43F5E"/>
+                </a:solidFill>
+              </a:rPr>
+              <a:t>• </a:t>
+            </a:r>
+            <a:r>
+              <a:rPr b="1" sz="1100">
+                <a:solidFill>
+                  <a:srgbClr val="1E293B"/>
+                </a:solidFill>
+              </a:rPr>
+              <a:t>Forgery Risk Score Head: </a:t>
+            </a:r>
+            <a:r>
+              <a:rPr sz="1100">
+                <a:solidFill>
+                  <a:srgbClr val="64748B"/>
+                </a:solidFill>
+              </a:rPr>
+              <a:t>Estimates continuous document tampering probability (0.0% to 100.0%) via scaled sigmoid activation.</a:t>
+            </a:r>
+          </a:p>
+          <a:p>
+            <a:pPr>
+              <a:spcBef>
+                <a:spcPts val="600"/>
+              </a:spcBef>
+            </a:pPr>
+            <a:r>
+              <a:rPr b="1" sz="1100">
+                <a:solidFill>
+                  <a:srgbClr val="F43F5E"/>
+                </a:solidFill>
+              </a:rPr>
+              <a:t>• </a:t>
+            </a:r>
+            <a:r>
+              <a:rPr b="1" sz="1100">
+                <a:solidFill>
+                  <a:srgbClr val="1E293B"/>
+                </a:solidFill>
+              </a:rPr>
+              <a:t>Tampered Bounding Area Head: </a:t>
+            </a:r>
+            <a:r>
+              <a:rPr sz="1100">
+                <a:solidFill>
+                  <a:srgbClr val="64748B"/>
+                </a:solidFill>
+              </a:rPr>
+              <a:t>Predicts the exact percentage of compromised document surface area (0.0% to 50.0%).</a:t>
+            </a:r>
+          </a:p>
+          <a:p>
+            <a:pPr>
+              <a:spcBef>
+                <a:spcPts val="600"/>
+              </a:spcBef>
+            </a:pPr>
+            <a:r>
+              <a:rPr b="1" sz="1100">
+                <a:solidFill>
+                  <a:srgbClr val="F43F5E"/>
+                </a:solidFill>
+              </a:rPr>
+              <a:t>• </a:t>
+            </a:r>
+            <a:r>
+              <a:rPr b="1" sz="1100">
+                <a:solidFill>
+                  <a:srgbClr val="1E293B"/>
+                </a:solidFill>
+              </a:rPr>
+              <a:t>ELA Discrepancy Index Head: </a:t>
+            </a:r>
+            <a:r>
+              <a:rPr sz="1100">
+                <a:solidFill>
+                  <a:srgbClr val="64748B"/>
+                </a:solidFill>
+              </a:rPr>
+              <a:t>Quantifies compression difference between questioned region and document baseline (0.0 to 10.0 pts).</a:t>
+            </a:r>
+          </a:p>
+        </p:txBody>
+      </p:sp>
+      <p:sp>
+        <p:nvSpPr>
+          <p:cNvPr id="5" name="Rectangle 4"/>
+          <p:cNvSpPr/>
+          <p:nvPr/>
+        </p:nvSpPr>
+        <p:spPr>
+          <a:xfrm>
+            <a:off x="6217920" y="1371600"/>
+            <a:ext cx="5212080" cy="4937760"/>
+          </a:xfrm>
+          <a:prstGeom prst="rect">
+            <a:avLst/>
+          </a:prstGeom>
+          <a:solidFill>
+            <a:srgbClr val="FFFFFF"/>
+          </a:solidFill>
+          <a:ln w="12700">
+            <a:solidFill>
+              <a:srgbClr val="E2E8F0"/>
+            </a:solidFill>
+          </a:ln>
+        </p:spPr>
+        <p:style>
+          <a:lnRef idx="1">
+            <a:schemeClr val="accent1"/>
+          </a:lnRef>
+          <a:fillRef idx="3">
+            <a:schemeClr val="accent1"/>
+          </a:fillRef>
+          <a:effectRef idx="2">
+            <a:schemeClr val="accent1"/>
+          </a:effectRef>
+          <a:fontRef idx="minor">
+            <a:schemeClr val="lt1"/>
+          </a:fontRef>
+        </p:style>
+        <p:txBody>
+          <a:bodyPr rtlCol="0" anchor="ctr"/>
+          <a:lstStyle/>
+          <a:p>
+            <a:pPr algn="ctr"/>
+          </a:p>
+        </p:txBody>
+      </p:sp>
+      <p:sp>
+        <p:nvSpPr>
+          <p:cNvPr id="6" name="TextBox 5"/>
           <p:cNvSpPr txBox="1"/>
           <p:nvPr/>
         </p:nvSpPr>
         <p:spPr>
           <a:xfrm>
-            <a:off x="731520" y="1371600"/>
-            <a:ext cx="10698480" cy="5029200"/>
+            <a:off x="6400800" y="1554480"/>
+            <a:ext cx="4846320" cy="4572000"/>
           </a:xfrm>
           <a:prstGeom prst="rect">
             <a:avLst/>
@@ -4298,68 +7474,142 @@
           <a:noFill/>
         </p:spPr>
         <p:txBody>
-          <a:bodyPr wrap="square">
+          <a:bodyPr wrap="square" lIns="0" tIns="0" rIns="0" bIns="0">
             <a:spAutoFit/>
           </a:bodyPr>
           <a:lstStyle/>
           <a:p>
+            <a:r>
+              <a:rPr b="1" sz="1400">
+                <a:solidFill>
+                  <a:srgbClr val="0F172A"/>
+                </a:solidFill>
+              </a:rPr>
+              <a:t>10-Dimensional Forensic Feature Vector</a:t>
+            </a:r>
+          </a:p>
+          <a:p>
             <a:pPr>
               <a:spcBef>
-                <a:spcPts val="1200"/>
+                <a:spcPts val="600"/>
               </a:spcBef>
-              <a:defRPr sz="1500" b="1">
-                <a:solidFill>
-                  <a:srgbClr val="10B981"/>
-                </a:solidFill>
-              </a:defRPr>
             </a:pPr>
             <a:r>
-              <a:t>★ Validation Accuracy / Score: Achieved 94.8% on independent validation test holdout partitions.</a:t>
+              <a:rPr b="1" sz="1100">
+                <a:solidFill>
+                  <a:srgbClr val="F43F5E"/>
+                </a:solidFill>
+              </a:rPr>
+              <a:t>• </a:t>
+            </a:r>
+            <a:r>
+              <a:rPr b="1" sz="1100">
+                <a:solidFill>
+                  <a:srgbClr val="1E293B"/>
+                </a:solidFill>
+              </a:rPr>
+              <a:t>ELA Residual Mean &amp; Variance: </a:t>
+            </a:r>
+            <a:r>
+              <a:rPr sz="1100">
+                <a:solidFill>
+                  <a:srgbClr val="64748B"/>
+                </a:solidFill>
+              </a:rPr>
+              <a:t>Captures mean pixel error and localized variance after Q95 re-compression.</a:t>
             </a:r>
           </a:p>
           <a:p>
             <a:pPr>
               <a:spcBef>
-                <a:spcPts val="1200"/>
+                <a:spcPts val="600"/>
               </a:spcBef>
-              <a:defRPr sz="1500" b="1">
-                <a:solidFill>
-                  <a:srgbClr val="10B981"/>
-                </a:solidFill>
-              </a:defRPr>
             </a:pPr>
             <a:r>
-              <a:t>★ F1-Score / Macro Precision: Balanced metric of 0.932 across positive and negative classification targets.</a:t>
+              <a:rPr b="1" sz="1100">
+                <a:solidFill>
+                  <a:srgbClr val="F43F5E"/>
+                </a:solidFill>
+              </a:rPr>
+              <a:t>• </a:t>
+            </a:r>
+            <a:r>
+              <a:rPr b="1" sz="1100">
+                <a:solidFill>
+                  <a:srgbClr val="1E293B"/>
+                </a:solidFill>
+              </a:rPr>
+              <a:t>2D-DCT High-Pass Noise Energy: </a:t>
+            </a:r>
+            <a:r>
+              <a:rPr sz="1100">
+                <a:solidFill>
+                  <a:srgbClr val="64748B"/>
+                </a:solidFill>
+              </a:rPr>
+              <a:t>Isolates high-frequency sensor noise discrepancies between authentic paper and forged elements.</a:t>
             </a:r>
           </a:p>
           <a:p>
             <a:pPr>
               <a:spcBef>
-                <a:spcPts val="1200"/>
+                <a:spcPts val="600"/>
               </a:spcBef>
-              <a:defRPr sz="1500" b="1">
-                <a:solidFill>
-                  <a:srgbClr val="10B981"/>
-                </a:solidFill>
-              </a:defRPr>
             </a:pPr>
             <a:r>
-              <a:t>★ Inference Latency Profile: Median latency of 18.4 ms per inference query on edge CPU hardware.</a:t>
+              <a:rPr b="1" sz="1100">
+                <a:solidFill>
+                  <a:srgbClr val="F43F5E"/>
+                </a:solidFill>
+              </a:rPr>
+              <a:t>• </a:t>
+            </a:r>
+            <a:r>
+              <a:rPr b="1" sz="1100">
+                <a:solidFill>
+                  <a:srgbClr val="1E293B"/>
+                </a:solidFill>
+              </a:rPr>
+              <a:t>Quantization Table Discrepancy: </a:t>
+            </a:r>
+            <a:r>
+              <a:rPr sz="1100">
+                <a:solidFill>
+                  <a:srgbClr val="64748B"/>
+                </a:solidFill>
+              </a:rPr>
+              <a:t>Detects foreign quantization matrices introduced by external image editing applications.</a:t>
             </a:r>
           </a:p>
           <a:p>
             <a:pPr>
               <a:spcBef>
-                <a:spcPts val="1200"/>
+                <a:spcPts val="600"/>
               </a:spcBef>
-              <a:defRPr sz="1500" b="1">
-                <a:solidFill>
-                  <a:srgbClr val="10B981"/>
-                </a:solidFill>
-              </a:defRPr>
             </a:pPr>
             <a:r>
-              <a:t>★ False Positive Rate (FPR): Maintained below 2.8%, satisfying stringent operational false alarm constraints.</a:t>
+              <a:rPr b="1" sz="1100">
+                <a:solidFill>
+                  <a:srgbClr val="F43F5E"/>
+                </a:solidFill>
+              </a:rPr>
+              <a:t>• </a:t>
+            </a:r>
+            <a:r>
+              <a:rPr b="1" sz="1100">
+                <a:solidFill>
+                  <a:srgbClr val="1E293B"/>
+                </a:solidFill>
+              </a:rPr>
+              <a:t>Laplacian Edge Sharpness: </a:t>
+            </a:r>
+            <a:r>
+              <a:rPr sz="1100">
+                <a:solidFill>
+                  <a:srgbClr val="64748B"/>
+                </a:solidFill>
+              </a:rPr>
+              <a:t>Differentiates blurred inpainting transitions from authentic crisp typography.</a:t>
             </a:r>
           </a:p>
         </p:txBody>
@@ -4384,23 +7634,92 @@
       <p:grpSpPr/>
       <p:sp>
         <p:nvSpPr>
-          <p:cNvPr id="2" name="Rectangle 1"/>
+          <p:cNvPr id="2" name="TextBox 1"/>
+          <p:cNvSpPr txBox="1"/>
+          <p:nvPr/>
+        </p:nvSpPr>
+        <p:spPr>
+          <a:xfrm>
+            <a:off x="731520" y="365760"/>
+            <a:ext cx="10728655" cy="822960"/>
+          </a:xfrm>
+          <a:prstGeom prst="rect">
+            <a:avLst/>
+          </a:prstGeom>
+          <a:noFill/>
+        </p:spPr>
+        <p:txBody>
+          <a:bodyPr wrap="square" lIns="0" tIns="0" rIns="0" bIns="0">
+            <a:spAutoFit/>
+          </a:bodyPr>
+          <a:lstStyle/>
+          <a:p>
+            <a:r>
+              <a:rPr b="1" sz="1000">
+                <a:solidFill>
+                  <a:srgbClr val="F43F5E"/>
+                </a:solidFill>
+              </a:rPr>
+              <a:t>FORENSIC VISION • PROJECT-043</a:t>
+            </a:r>
+          </a:p>
+          <a:p>
+            <a:r>
+              <a:rPr b="1" sz="2000">
+                <a:solidFill>
+                  <a:srgbClr val="0F172A"/>
+                </a:solidFill>
+              </a:rPr>
+              <a:t>Dual-Domain Forensic Heatmap Canvas</a:t>
+            </a:r>
+          </a:p>
+        </p:txBody>
+      </p:sp>
+      <p:pic>
+        <p:nvPicPr>
+          <p:cNvPr id="3" name="Picture 2" descr="02_dual_domain_ela_dct_canvas.png"/>
+          <p:cNvPicPr>
+            <a:picLocks noChangeAspect="1"/>
+          </p:cNvPicPr>
+          <p:nvPr/>
+        </p:nvPicPr>
+        <p:blipFill>
+          <a:blip r:embed="rId2"/>
+          <a:stretch>
+            <a:fillRect/>
+          </a:stretch>
+        </p:blipFill>
+        <p:spPr>
+          <a:xfrm>
+            <a:off x="731520" y="1371600"/>
+            <a:ext cx="6583680" cy="4937760"/>
+          </a:xfrm>
+          <a:prstGeom prst="rect">
+            <a:avLst/>
+          </a:prstGeom>
+        </p:spPr>
+      </p:pic>
+      <p:sp>
+        <p:nvSpPr>
+          <p:cNvPr id="4" name="Rectangle 3"/>
           <p:cNvSpPr/>
           <p:nvPr/>
         </p:nvSpPr>
         <p:spPr>
           <a:xfrm>
-            <a:off x="0" y="0"/>
-            <a:ext cx="12191695" cy="1097280"/>
+            <a:off x="7589520" y="1371600"/>
+            <a:ext cx="3840480" cy="4937760"/>
           </a:xfrm>
           <a:prstGeom prst="rect">
             <a:avLst/>
           </a:prstGeom>
           <a:solidFill>
-            <a:srgbClr val="0F172A"/>
+            <a:srgbClr val="FFFFFF"/>
           </a:solidFill>
-          <a:ln>
-            <a:noFill/>
+          <a:ln w="12700">
+            <a:solidFill>
+              <a:srgbClr val="E2E8F0"/>
+            </a:solidFill>
           </a:ln>
         </p:spPr>
         <p:style>
@@ -4427,14 +7746,14 @@
       </p:sp>
       <p:sp>
         <p:nvSpPr>
-          <p:cNvPr id="3" name="TextBox 2"/>
+          <p:cNvPr id="5" name="TextBox 4"/>
           <p:cNvSpPr txBox="1"/>
           <p:nvPr/>
         </p:nvSpPr>
         <p:spPr>
           <a:xfrm>
-            <a:off x="731520" y="137160"/>
-            <a:ext cx="10698480" cy="822960"/>
+            <a:off x="7772400" y="1554480"/>
+            <a:ext cx="3474720" cy="4572000"/>
           </a:xfrm>
           <a:prstGeom prst="rect">
             <a:avLst/>
@@ -4442,163 +7761,142 @@
           <a:noFill/>
         </p:spPr>
         <p:txBody>
-          <a:bodyPr wrap="square">
+          <a:bodyPr wrap="square" lIns="0" tIns="0" rIns="0" bIns="0">
             <a:spAutoFit/>
           </a:bodyPr>
           <a:lstStyle/>
           <a:p>
-            <a:pPr>
-              <a:defRPr sz="2400" b="1">
-                <a:solidFill>
-                  <a:srgbClr val="FFFFFF"/>
-                </a:solidFill>
-              </a:defRPr>
-            </a:pPr>
-            <a:r>
-              <a:t>6. Technology Stack &amp; Production Deployment</a:t>
-            </a:r>
-          </a:p>
-          <a:p>
-            <a:pPr>
-              <a:defRPr sz="1100">
-                <a:solidFill>
-                  <a:srgbClr val="94A3B8"/>
-                </a:solidFill>
-              </a:defRPr>
-            </a:pPr>
-            <a:r>
-              <a:t>Academic &amp; Industrial AI Project Series  |  Project 43 of 55</a:t>
-            </a:r>
-          </a:p>
-        </p:txBody>
-      </p:sp>
-      <p:sp>
-        <p:nvSpPr>
-          <p:cNvPr id="4" name="TextBox 3"/>
-          <p:cNvSpPr txBox="1"/>
-          <p:nvPr/>
-        </p:nvSpPr>
-        <p:spPr>
-          <a:xfrm>
-            <a:off x="731520" y="1371600"/>
-            <a:ext cx="10698480" cy="5029200"/>
-          </a:xfrm>
-          <a:prstGeom prst="rect">
-            <a:avLst/>
-          </a:prstGeom>
-          <a:noFill/>
-        </p:spPr>
-        <p:txBody>
-          <a:bodyPr wrap="square">
-            <a:spAutoFit/>
-          </a:bodyPr>
-          <a:lstStyle/>
+            <a:r>
+              <a:rPr b="1" sz="1400">
+                <a:solidFill>
+                  <a:srgbClr val="0F172A"/>
+                </a:solidFill>
+              </a:rPr>
+              <a:t>Canvas Visualization Mechanics</a:t>
+            </a:r>
+          </a:p>
           <a:p>
             <a:pPr>
               <a:spcBef>
-                <a:spcPts val="800"/>
+                <a:spcPts val="600"/>
               </a:spcBef>
-              <a:defRPr sz="1500" b="1">
-                <a:solidFill>
-                  <a:srgbClr val="1E3A8A"/>
-                </a:solidFill>
-              </a:defRPr>
             </a:pPr>
             <a:r>
-              <a:t>⚙ Core Machine Learning Framework</a:t>
-            </a:r>
-          </a:p>
-          <a:p>
-            <a:pPr>
-              <a:defRPr sz="1300">
-                <a:solidFill>
-                  <a:srgbClr val="475569"/>
-                </a:solidFill>
-              </a:defRPr>
-            </a:pPr>
-            <a:r>
-              <a:t>PyTorch 2.0+ / Scikit-learn / HuggingFace Transformers / OpenCV</a:t>
+              <a:rPr b="1" sz="1100">
+                <a:solidFill>
+                  <a:srgbClr val="F43F5E"/>
+                </a:solidFill>
+              </a:rPr>
+              <a:t>• </a:t>
+            </a:r>
+            <a:r>
+              <a:rPr b="1" sz="1100">
+                <a:solidFill>
+                  <a:srgbClr val="1E293B"/>
+                </a:solidFill>
+              </a:rPr>
+              <a:t>60 FPS HTML5 Canvas HUD: </a:t>
+            </a:r>
+            <a:r>
+              <a:rPr sz="1100">
+                <a:solidFill>
+                  <a:srgbClr val="64748B"/>
+                </a:solidFill>
+              </a:rPr>
+              <a:t>Hardware-accelerated rendering displaying side-by-side forensic streams in real time.</a:t>
             </a:r>
           </a:p>
           <a:p>
             <a:pPr>
               <a:spcBef>
-                <a:spcPts val="800"/>
+                <a:spcPts val="600"/>
               </a:spcBef>
-              <a:defRPr sz="1500" b="1">
-                <a:solidFill>
-                  <a:srgbClr val="1E3A8A"/>
-                </a:solidFill>
-              </a:defRPr>
             </a:pPr>
             <a:r>
-              <a:t>⚙ Asynchronous REST Backend</a:t>
-            </a:r>
-          </a:p>
-          <a:p>
-            <a:pPr>
-              <a:defRPr sz="1300">
-                <a:solidFill>
-                  <a:srgbClr val="475569"/>
-                </a:solidFill>
-              </a:defRPr>
-            </a:pPr>
-            <a:r>
-              <a:t>FastAPI / Uvicorn ASGI Server / Pydantic V2 Type Safety</a:t>
+              <a:rPr b="1" sz="1100">
+                <a:solidFill>
+                  <a:srgbClr val="F43F5E"/>
+                </a:solidFill>
+              </a:rPr>
+              <a:t>• </a:t>
+            </a:r>
+            <a:r>
+              <a:rPr b="1" sz="1100">
+                <a:solidFill>
+                  <a:srgbClr val="1E293B"/>
+                </a:solidFill>
+              </a:rPr>
+              <a:t>Left Stream: Spatial ELA Heatmap: </a:t>
+            </a:r>
+            <a:r>
+              <a:rPr sz="1100">
+                <a:solidFill>
+                  <a:srgbClr val="64748B"/>
+                </a:solidFill>
+              </a:rPr>
+              <a:t>Simulates dynamic Error Level Analysis residual noise and compression variance reticles.</a:t>
             </a:r>
           </a:p>
           <a:p>
             <a:pPr>
               <a:spcBef>
-                <a:spcPts val="800"/>
+                <a:spcPts val="600"/>
               </a:spcBef>
-              <a:defRPr sz="1500" b="1">
-                <a:solidFill>
-                  <a:srgbClr val="1E3A8A"/>
-                </a:solidFill>
-              </a:defRPr>
             </a:pPr>
             <a:r>
-              <a:t>⚙ Data Persistence &amp; Storage</a:t>
-            </a:r>
-          </a:p>
-          <a:p>
-            <a:pPr>
-              <a:defRPr sz="1300">
-                <a:solidFill>
-                  <a:srgbClr val="475569"/>
-                </a:solidFill>
-              </a:defRPr>
-            </a:pPr>
-            <a:r>
-              <a:t>SQLite / PostgreSQL with transactional integrity &amp; audit trail</a:t>
+              <a:rPr b="1" sz="1100">
+                <a:solidFill>
+                  <a:srgbClr val="F43F5E"/>
+                </a:solidFill>
+              </a:rPr>
+              <a:t>• </a:t>
+            </a:r>
+            <a:r>
+              <a:rPr b="1" sz="1100">
+                <a:solidFill>
+                  <a:srgbClr val="1E293B"/>
+                </a:solidFill>
+              </a:rPr>
+              <a:t>Right Stream: 2D-DCT Frequency Noise: </a:t>
+            </a:r>
+            <a:r>
+              <a:rPr sz="1100">
+                <a:solidFill>
+                  <a:srgbClr val="64748B"/>
+                </a:solidFill>
+              </a:rPr>
+              <a:t>Visualizes high-pass filtered discrete cosine transform noise variance patterns.</a:t>
             </a:r>
           </a:p>
           <a:p>
             <a:pPr>
               <a:spcBef>
-                <a:spcPts val="800"/>
+                <a:spcPts val="600"/>
               </a:spcBef>
-              <a:defRPr sz="1500" b="1">
-                <a:solidFill>
-                  <a:srgbClr val="1E3A8A"/>
-                </a:solidFill>
-              </a:defRPr>
             </a:pPr>
             <a:r>
-              <a:t>⚙ Interactive Frontend Layer</a:t>
-            </a:r>
-          </a:p>
-          <a:p>
-            <a:pPr>
-              <a:defRPr sz="1300">
-                <a:solidFill>
-                  <a:srgbClr val="475569"/>
-                </a:solidFill>
-              </a:defRPr>
-            </a:pPr>
-            <a:r>
-              <a:t>Modern Responsive Web Portal (HTML5, Tailwind/CSS, JavaScript ES6+)</a:t>
+              <a:rPr b="1" sz="1100">
+                <a:solidFill>
+                  <a:srgbClr val="F43F5E"/>
+                </a:solidFill>
+              </a:rPr>
+              <a:t>• </a:t>
+            </a:r>
+            <a:r>
+              <a:rPr b="1" sz="1100">
+                <a:solidFill>
+                  <a:srgbClr val="1E293B"/>
+                </a:solidFill>
+              </a:rPr>
+              <a:t>Glowing Tampering Bounding Box: </a:t>
+            </a:r>
+            <a:r>
+              <a:rPr sz="1100">
+                <a:solidFill>
+                  <a:srgbClr val="64748B"/>
+                </a:solidFill>
+              </a:rPr>
+              <a:t>Dynamic pulsating red/indigo bounding boxes highlight tampered areas upon forgery detection.</a:t>
             </a:r>
           </a:p>
         </p:txBody>
@@ -4623,23 +7921,92 @@
       <p:grpSpPr/>
       <p:sp>
         <p:nvSpPr>
-          <p:cNvPr id="2" name="Rectangle 1"/>
+          <p:cNvPr id="2" name="TextBox 1"/>
+          <p:cNvSpPr txBox="1"/>
+          <p:nvPr/>
+        </p:nvSpPr>
+        <p:spPr>
+          <a:xfrm>
+            <a:off x="731520" y="365760"/>
+            <a:ext cx="10728655" cy="822960"/>
+          </a:xfrm>
+          <a:prstGeom prst="rect">
+            <a:avLst/>
+          </a:prstGeom>
+          <a:noFill/>
+        </p:spPr>
+        <p:txBody>
+          <a:bodyPr wrap="square" lIns="0" tIns="0" rIns="0" bIns="0">
+            <a:spAutoFit/>
+          </a:bodyPr>
+          <a:lstStyle/>
+          <a:p>
+            <a:r>
+              <a:rPr b="1" sz="1000">
+                <a:solidFill>
+                  <a:srgbClr val="F43F5E"/>
+                </a:solidFill>
+              </a:rPr>
+              <a:t>SIGNAL PROCESSING • PROJECT-043</a:t>
+            </a:r>
+          </a:p>
+          <a:p>
+            <a:r>
+              <a:rPr b="1" sz="2000">
+                <a:solidFill>
+                  <a:srgbClr val="0F172A"/>
+                </a:solidFill>
+              </a:rPr>
+              <a:t>Dynamic Forensic Telemetry Streaming</a:t>
+            </a:r>
+          </a:p>
+        </p:txBody>
+      </p:sp>
+      <p:pic>
+        <p:nvPicPr>
+          <p:cNvPr id="3" name="Picture 2" descr="03_forensic_telemetry_chart.png"/>
+          <p:cNvPicPr>
+            <a:picLocks noChangeAspect="1"/>
+          </p:cNvPicPr>
+          <p:nvPr/>
+        </p:nvPicPr>
+        <p:blipFill>
+          <a:blip r:embed="rId2"/>
+          <a:stretch>
+            <a:fillRect/>
+          </a:stretch>
+        </p:blipFill>
+        <p:spPr>
+          <a:xfrm>
+            <a:off x="731520" y="1371600"/>
+            <a:ext cx="6583680" cy="4937760"/>
+          </a:xfrm>
+          <a:prstGeom prst="rect">
+            <a:avLst/>
+          </a:prstGeom>
+        </p:spPr>
+      </p:pic>
+      <p:sp>
+        <p:nvSpPr>
+          <p:cNvPr id="4" name="Rectangle 3"/>
           <p:cNvSpPr/>
           <p:nvPr/>
         </p:nvSpPr>
         <p:spPr>
           <a:xfrm>
-            <a:off x="0" y="0"/>
-            <a:ext cx="12191695" cy="1097280"/>
+            <a:off x="7589520" y="1371600"/>
+            <a:ext cx="3840480" cy="4937760"/>
           </a:xfrm>
           <a:prstGeom prst="rect">
             <a:avLst/>
           </a:prstGeom>
           <a:solidFill>
-            <a:srgbClr val="0F172A"/>
+            <a:srgbClr val="FFFFFF"/>
           </a:solidFill>
-          <a:ln>
-            <a:noFill/>
+          <a:ln w="12700">
+            <a:solidFill>
+              <a:srgbClr val="E2E8F0"/>
+            </a:solidFill>
           </a:ln>
         </p:spPr>
         <p:style>
@@ -4666,14 +8033,14 @@
       </p:sp>
       <p:sp>
         <p:nvSpPr>
-          <p:cNvPr id="3" name="TextBox 2"/>
+          <p:cNvPr id="5" name="TextBox 4"/>
           <p:cNvSpPr txBox="1"/>
           <p:nvPr/>
         </p:nvSpPr>
         <p:spPr>
           <a:xfrm>
-            <a:off x="731520" y="137160"/>
-            <a:ext cx="10698480" cy="822960"/>
+            <a:off x="7772400" y="1554480"/>
+            <a:ext cx="3474720" cy="4572000"/>
           </a:xfrm>
           <a:prstGeom prst="rect">
             <a:avLst/>
@@ -4681,46 +8048,174 @@
           <a:noFill/>
         </p:spPr>
         <p:txBody>
-          <a:bodyPr wrap="square">
+          <a:bodyPr wrap="square" lIns="0" tIns="0" rIns="0" bIns="0">
             <a:spAutoFit/>
           </a:bodyPr>
           <a:lstStyle/>
           <a:p>
+            <a:r>
+              <a:rPr b="1" sz="1400">
+                <a:solidFill>
+                  <a:srgbClr val="0F172A"/>
+                </a:solidFill>
+              </a:rPr>
+              <a:t>Telemetry Analytics Insights</a:t>
+            </a:r>
+          </a:p>
+          <a:p>
             <a:pPr>
-              <a:defRPr sz="2400" b="1">
-                <a:solidFill>
-                  <a:srgbClr val="FFFFFF"/>
-                </a:solidFill>
-              </a:defRPr>
+              <a:spcBef>
+                <a:spcPts val="600"/>
+              </a:spcBef>
             </a:pPr>
             <a:r>
-              <a:t>7. Conclusion &amp; Future Roadmap</a:t>
+              <a:rPr b="1" sz="1100">
+                <a:solidFill>
+                  <a:srgbClr val="F43F5E"/>
+                </a:solidFill>
+              </a:rPr>
+              <a:t>• </a:t>
+            </a:r>
+            <a:r>
+              <a:rPr b="1" sz="1100">
+                <a:solidFill>
+                  <a:srgbClr val="1E293B"/>
+                </a:solidFill>
+              </a:rPr>
+              <a:t>ELA Discrepancy Index Curve: </a:t>
+            </a:r>
+            <a:r>
+              <a:rPr sz="1100">
+                <a:solidFill>
+                  <a:srgbClr val="64748B"/>
+                </a:solidFill>
+              </a:rPr>
+              <a:t>Continuous tracking of compression discrepancy score (nominal authentic range: 0.1 - 0.8 pts).</a:t>
             </a:r>
           </a:p>
           <a:p>
             <a:pPr>
-              <a:defRPr sz="1100">
-                <a:solidFill>
-                  <a:srgbClr val="94A3B8"/>
-                </a:solidFill>
-              </a:defRPr>
+              <a:spcBef>
+                <a:spcPts val="600"/>
+              </a:spcBef>
             </a:pPr>
             <a:r>
-              <a:t>Academic &amp; Industrial AI Project Series  |  Project 43 of 55</a:t>
-            </a:r>
-          </a:p>
-        </p:txBody>
-      </p:sp>
-      <p:sp>
-        <p:nvSpPr>
-          <p:cNvPr id="4" name="TextBox 3"/>
+              <a:rPr b="1" sz="1100">
+                <a:solidFill>
+                  <a:srgbClr val="F43F5E"/>
+                </a:solidFill>
+              </a:rPr>
+              <a:t>• </a:t>
+            </a:r>
+            <a:r>
+              <a:rPr b="1" sz="1100">
+                <a:solidFill>
+                  <a:srgbClr val="1E293B"/>
+                </a:solidFill>
+              </a:rPr>
+              <a:t>Spectral 2D-DCT Noise Waveform: </a:t>
+            </a:r>
+            <a:r>
+              <a:rPr sz="1100">
+                <a:solidFill>
+                  <a:srgbClr val="64748B"/>
+                </a:solidFill>
+              </a:rPr>
+              <a:t>Real-time quantification of sensor noise energy (authentic baseline: 0.04 - 0.18).</a:t>
+            </a:r>
+          </a:p>
+          <a:p>
+            <a:pPr>
+              <a:spcBef>
+                <a:spcPts val="600"/>
+              </a:spcBef>
+            </a:pPr>
+            <a:r>
+              <a:rPr b="1" sz="1100">
+                <a:solidFill>
+                  <a:srgbClr val="F43F5E"/>
+                </a:solidFill>
+              </a:rPr>
+              <a:t>• </a:t>
+            </a:r>
+            <a:r>
+              <a:rPr b="1" sz="1100">
+                <a:solidFill>
+                  <a:srgbClr val="1E293B"/>
+                </a:solidFill>
+              </a:rPr>
+              <a:t>Dual-Axis Temporal Ingestion: </a:t>
+            </a:r>
+            <a:r>
+              <a:rPr sz="1100">
+                <a:solidFill>
+                  <a:srgbClr val="64748B"/>
+                </a:solidFill>
+              </a:rPr>
+              <a:t>Synchronized multi-axis time series with 10-second intervals for instant anomaly tracking.</a:t>
+            </a:r>
+          </a:p>
+          <a:p>
+            <a:pPr>
+              <a:spcBef>
+                <a:spcPts val="600"/>
+              </a:spcBef>
+            </a:pPr>
+            <a:r>
+              <a:rPr b="1" sz="1100">
+                <a:solidFill>
+                  <a:srgbClr val="F43F5E"/>
+                </a:solidFill>
+              </a:rPr>
+              <a:t>• </a:t>
+            </a:r>
+            <a:r>
+              <a:rPr b="1" sz="1100">
+                <a:solidFill>
+                  <a:srgbClr val="1E293B"/>
+                </a:solidFill>
+              </a:rPr>
+              <a:t>Immediate Tampering Spike: </a:t>
+            </a:r>
+            <a:r>
+              <a:rPr sz="1100">
+                <a:solidFill>
+                  <a:srgbClr val="64748B"/>
+                </a:solidFill>
+              </a:rPr>
+              <a:t>Manipulated documents immediately trigger a sharp spike in ELA discrepancy (&gt;7.0) and DCT noise (&gt;0.75).</a:t>
+            </a:r>
+          </a:p>
+        </p:txBody>
+      </p:sp>
+    </p:spTree>
+  </p:cSld>
+  <p:clrMapOvr>
+    <a:masterClrMapping/>
+  </p:clrMapOvr>
+</p:sld>
+</file>
+
+<file path=ppt/slides/slide9.xml><?xml version="1.0" encoding="utf-8"?>
+<p:sld xmlns:a="http://schemas.openxmlformats.org/drawingml/2006/main" xmlns:p="http://schemas.openxmlformats.org/presentationml/2006/main" xmlns:r="http://schemas.openxmlformats.org/officeDocument/2006/relationships">
+  <p:cSld>
+    <p:spTree>
+      <p:nvGrpSpPr>
+        <p:cNvPr id="1" name=""/>
+        <p:cNvGrpSpPr/>
+        <p:nvPr/>
+      </p:nvGrpSpPr>
+      <p:grpSpPr/>
+      <p:sp>
+        <p:nvSpPr>
+          <p:cNvPr id="2" name="TextBox 1"/>
           <p:cNvSpPr txBox="1"/>
           <p:nvPr/>
         </p:nvSpPr>
         <p:spPr>
           <a:xfrm>
-            <a:off x="731520" y="1371600"/>
-            <a:ext cx="10698480" cy="5029200"/>
+            <a:off x="731520" y="365760"/>
+            <a:ext cx="10728655" cy="822960"/>
           </a:xfrm>
           <a:prstGeom prst="rect">
             <a:avLst/>
@@ -4728,89 +8223,254 @@
           <a:noFill/>
         </p:spPr>
         <p:txBody>
-          <a:bodyPr wrap="square">
+          <a:bodyPr wrap="square" lIns="0" tIns="0" rIns="0" bIns="0">
             <a:spAutoFit/>
           </a:bodyPr>
           <a:lstStyle/>
           <a:p>
+            <a:r>
+              <a:rPr b="1" sz="1000">
+                <a:solidFill>
+                  <a:srgbClr val="F43F5E"/>
+                </a:solidFill>
+              </a:rPr>
+              <a:t>LIVE AUDIT FLOW • PROJECT-043</a:t>
+            </a:r>
+          </a:p>
+          <a:p>
+            <a:r>
+              <a:rPr b="1" sz="2000">
+                <a:solidFill>
+                  <a:srgbClr val="0F172A"/>
+                </a:solidFill>
+              </a:rPr>
+              <a:t>Authentic Document Audit: Commercial Tax Invoice</a:t>
+            </a:r>
+          </a:p>
+        </p:txBody>
+      </p:sp>
+      <p:pic>
+        <p:nvPicPr>
+          <p:cNvPr id="3" name="Picture 2" descr="04_authentic_invoice_inspection.png"/>
+          <p:cNvPicPr>
+            <a:picLocks noChangeAspect="1"/>
+          </p:cNvPicPr>
+          <p:nvPr/>
+        </p:nvPicPr>
+        <p:blipFill>
+          <a:blip r:embed="rId2"/>
+          <a:stretch>
+            <a:fillRect/>
+          </a:stretch>
+        </p:blipFill>
+        <p:spPr>
+          <a:xfrm>
+            <a:off x="731520" y="1371600"/>
+            <a:ext cx="6583680" cy="4937760"/>
+          </a:xfrm>
+          <a:prstGeom prst="rect">
+            <a:avLst/>
+          </a:prstGeom>
+        </p:spPr>
+      </p:pic>
+      <p:sp>
+        <p:nvSpPr>
+          <p:cNvPr id="4" name="Rectangle 3"/>
+          <p:cNvSpPr/>
+          <p:nvPr/>
+        </p:nvSpPr>
+        <p:spPr>
+          <a:xfrm>
+            <a:off x="7589520" y="1371600"/>
+            <a:ext cx="3840480" cy="4937760"/>
+          </a:xfrm>
+          <a:prstGeom prst="rect">
+            <a:avLst/>
+          </a:prstGeom>
+          <a:solidFill>
+            <a:srgbClr val="FFFFFF"/>
+          </a:solidFill>
+          <a:ln w="12700">
+            <a:solidFill>
+              <a:srgbClr val="E2E8F0"/>
+            </a:solidFill>
+          </a:ln>
+        </p:spPr>
+        <p:style>
+          <a:lnRef idx="1">
+            <a:schemeClr val="accent1"/>
+          </a:lnRef>
+          <a:fillRef idx="3">
+            <a:schemeClr val="accent1"/>
+          </a:fillRef>
+          <a:effectRef idx="2">
+            <a:schemeClr val="accent1"/>
+          </a:effectRef>
+          <a:fontRef idx="minor">
+            <a:schemeClr val="lt1"/>
+          </a:fontRef>
+        </p:style>
+        <p:txBody>
+          <a:bodyPr rtlCol="0" anchor="ctr"/>
+          <a:lstStyle/>
+          <a:p>
+            <a:pPr algn="ctr"/>
+          </a:p>
+        </p:txBody>
+      </p:sp>
+      <p:sp>
+        <p:nvSpPr>
+          <p:cNvPr id="5" name="TextBox 4"/>
+          <p:cNvSpPr txBox="1"/>
+          <p:nvPr/>
+        </p:nvSpPr>
+        <p:spPr>
+          <a:xfrm>
+            <a:off x="7772400" y="1554480"/>
+            <a:ext cx="3474720" cy="4572000"/>
+          </a:xfrm>
+          <a:prstGeom prst="rect">
+            <a:avLst/>
+          </a:prstGeom>
+          <a:noFill/>
+        </p:spPr>
+        <p:txBody>
+          <a:bodyPr wrap="square" lIns="0" tIns="0" rIns="0" bIns="0">
+            <a:spAutoFit/>
+          </a:bodyPr>
+          <a:lstStyle/>
+          <a:p>
+            <a:r>
+              <a:rPr b="1" sz="1400">
+                <a:solidFill>
+                  <a:srgbClr val="0F172A"/>
+                </a:solidFill>
+              </a:rPr>
+              <a:t>Authentic Audit Breakdown</a:t>
+            </a:r>
+          </a:p>
+          <a:p>
             <a:pPr>
               <a:spcBef>
-                <a:spcPts val="1000"/>
+                <a:spcPts val="600"/>
               </a:spcBef>
-              <a:defRPr sz="1500" b="1">
-                <a:solidFill>
-                  <a:srgbClr val="0F172A"/>
-                </a:solidFill>
-              </a:defRPr>
             </a:pPr>
             <a:r>
-              <a:t>■ Project Accomplishments</a:t>
-            </a:r>
-          </a:p>
-          <a:p>
-            <a:pPr>
-              <a:defRPr sz="1300">
-                <a:solidFill>
-                  <a:srgbClr val="475569"/>
-                </a:solidFill>
-              </a:defRPr>
-            </a:pPr>
-            <a:r>
-              <a:t>Engineered a robust, end-to-end prototype validating the initial abstract with reproducible experiments.</a:t>
+              <a:rPr b="1" sz="1100">
+                <a:solidFill>
+                  <a:srgbClr val="F43F5E"/>
+                </a:solidFill>
+              </a:rPr>
+              <a:t>• </a:t>
+            </a:r>
+            <a:r>
+              <a:rPr b="1" sz="1100">
+                <a:solidFill>
+                  <a:srgbClr val="1E293B"/>
+                </a:solidFill>
+              </a:rPr>
+              <a:t>Forensic Verdict: AUTHENTIC: </a:t>
+            </a:r>
+            <a:r>
+              <a:rPr sz="1100">
+                <a:solidFill>
+                  <a:srgbClr val="64748B"/>
+                </a:solidFill>
+              </a:rPr>
+              <a:t>Verified legal validity; document approved for automated financial settlement.</a:t>
             </a:r>
           </a:p>
           <a:p>
             <a:pPr>
               <a:spcBef>
-                <a:spcPts val="1000"/>
+                <a:spcPts val="600"/>
               </a:spcBef>
-              <a:defRPr sz="1500" b="1">
-                <a:solidFill>
-                  <a:srgbClr val="0F172A"/>
-                </a:solidFill>
-              </a:defRPr>
             </a:pPr>
             <a:r>
-              <a:t>■ Industrial Significance</a:t>
-            </a:r>
-          </a:p>
-          <a:p>
-            <a:pPr>
-              <a:defRPr sz="1300">
-                <a:solidFill>
-                  <a:srgbClr val="475569"/>
-                </a:solidFill>
-              </a:defRPr>
-            </a:pPr>
-            <a:r>
-              <a:t>Eliminates latency and manual friction while ensuring high confidence automated decision support.</a:t>
+              <a:rPr b="1" sz="1100">
+                <a:solidFill>
+                  <a:srgbClr val="F43F5E"/>
+                </a:solidFill>
+              </a:rPr>
+              <a:t>• </a:t>
+            </a:r>
+            <a:r>
+              <a:rPr b="1" sz="1100">
+                <a:solidFill>
+                  <a:srgbClr val="1E293B"/>
+                </a:solidFill>
+              </a:rPr>
+              <a:t>Low Forgery Probability (&lt;5%): </a:t>
+            </a:r>
+            <a:r>
+              <a:rPr sz="1100">
+                <a:solidFill>
+                  <a:srgbClr val="64748B"/>
+                </a:solidFill>
+              </a:rPr>
+              <a:t>Confidence score confirms zero anomalous compression artifacts or copy-move signatures.</a:t>
             </a:r>
           </a:p>
           <a:p>
             <a:pPr>
               <a:spcBef>
-                <a:spcPts val="1000"/>
+                <a:spcPts val="600"/>
               </a:spcBef>
-              <a:defRPr sz="1500" b="1">
-                <a:solidFill>
-                  <a:srgbClr val="0F172A"/>
-                </a:solidFill>
-              </a:defRPr>
             </a:pPr>
             <a:r>
-              <a:t>■ Future Scope &amp; Extensions</a:t>
+              <a:rPr b="1" sz="1100">
+                <a:solidFill>
+                  <a:srgbClr val="F43F5E"/>
+                </a:solidFill>
+              </a:rPr>
+              <a:t>• </a:t>
+            </a:r>
+            <a:r>
+              <a:rPr b="1" sz="1100">
+                <a:solidFill>
+                  <a:srgbClr val="1E293B"/>
+                </a:solidFill>
+              </a:rPr>
+              <a:t>Tampered Area: 0.0%: </a:t>
+            </a:r>
+            <a:r>
+              <a:rPr sz="1100">
+                <a:solidFill>
+                  <a:srgbClr val="64748B"/>
+                </a:solidFill>
+              </a:rPr>
+              <a:t>Complete surface integrity; all text lines and numerical amounts exhibit uniform ELA residual.</a:t>
             </a:r>
           </a:p>
           <a:p>
             <a:pPr>
-              <a:defRPr sz="1300">
-                <a:solidFill>
-                  <a:srgbClr val="475569"/>
-                </a:solidFill>
-              </a:defRPr>
+              <a:spcBef>
+                <a:spcPts val="600"/>
+              </a:spcBef>
             </a:pPr>
             <a:r>
-              <a:t>Integration with federated edge sensors, distributed multi-tenant cloud clustering, and automated active learning.</a:t>
+              <a:rPr b="1" sz="1100">
+                <a:solidFill>
+                  <a:srgbClr val="F43F5E"/>
+                </a:solidFill>
+              </a:rPr>
+              <a:t>• </a:t>
+            </a:r>
+            <a:r>
+              <a:rPr b="1" sz="1100">
+                <a:solidFill>
+                  <a:srgbClr val="1E293B"/>
+                </a:solidFill>
+              </a:rPr>
+              <a:t>Cryptographic Evidence Hash: </a:t>
+            </a:r>
+            <a:r>
+              <a:rPr sz="1100">
+                <a:solidFill>
+                  <a:srgbClr val="64748B"/>
+                </a:solidFill>
+              </a:rPr>
+              <a:t>SHA-256 document fingerprint bound into the institutional audit ledger.</a:t>
             </a:r>
           </a:p>
         </p:txBody>
